--- a/week6_pythonI/week6_python.pptx
+++ b/week6_pythonI/week6_python.pptx
@@ -5,23 +5,26 @@
     <p:sldMasterId id="2147483648" r:id="rId1"/>
   </p:sldMasterIdLst>
   <p:notesMasterIdLst>
-    <p:notesMasterId r:id="rId16"/>
+    <p:notesMasterId r:id="rId19"/>
   </p:notesMasterIdLst>
   <p:sldIdLst>
     <p:sldId id="256" r:id="rId2"/>
     <p:sldId id="307" r:id="rId3"/>
     <p:sldId id="321" r:id="rId4"/>
-    <p:sldId id="317" r:id="rId5"/>
+    <p:sldId id="323" r:id="rId5"/>
     <p:sldId id="309" r:id="rId6"/>
     <p:sldId id="310" r:id="rId7"/>
     <p:sldId id="322" r:id="rId8"/>
-    <p:sldId id="314" r:id="rId9"/>
-    <p:sldId id="311" r:id="rId10"/>
-    <p:sldId id="316" r:id="rId11"/>
-    <p:sldId id="308" r:id="rId12"/>
-    <p:sldId id="318" r:id="rId13"/>
-    <p:sldId id="286" r:id="rId14"/>
-    <p:sldId id="320" r:id="rId15"/>
+    <p:sldId id="325" r:id="rId9"/>
+    <p:sldId id="314" r:id="rId10"/>
+    <p:sldId id="311" r:id="rId11"/>
+    <p:sldId id="316" r:id="rId12"/>
+    <p:sldId id="324" r:id="rId13"/>
+    <p:sldId id="317" r:id="rId14"/>
+    <p:sldId id="318" r:id="rId15"/>
+    <p:sldId id="308" r:id="rId16"/>
+    <p:sldId id="286" r:id="rId17"/>
+    <p:sldId id="320" r:id="rId18"/>
   </p:sldIdLst>
   <p:sldSz cx="12192000" cy="6858000"/>
   <p:notesSz cx="6858000" cy="9144000"/>
@@ -210,7 +213,7 @@
           <a:p>
             <a:fld id="{56D77398-3147-2349-91B4-8DD464C64BCA}" type="datetimeFigureOut">
               <a:rPr lang="en-US" smtClean="0"/>
-              <a:t>9/30/25</a:t>
+              <a:t>9/28/26</a:t>
             </a:fld>
             <a:endParaRPr lang="en-US"/>
           </a:p>
@@ -792,7 +795,7 @@
           <a:p>
             <a:fld id="{CDDF0107-2D27-914A-9F22-DFB09E04F050}" type="datetimeFigureOut">
               <a:rPr lang="en-US" smtClean="0"/>
-              <a:t>9/30/25</a:t>
+              <a:t>9/28/26</a:t>
             </a:fld>
             <a:endParaRPr lang="en-US"/>
           </a:p>
@@ -990,7 +993,7 @@
           <a:p>
             <a:fld id="{CDDF0107-2D27-914A-9F22-DFB09E04F050}" type="datetimeFigureOut">
               <a:rPr lang="en-US" smtClean="0"/>
-              <a:t>9/30/25</a:t>
+              <a:t>9/28/26</a:t>
             </a:fld>
             <a:endParaRPr lang="en-US"/>
           </a:p>
@@ -1198,7 +1201,7 @@
           <a:p>
             <a:fld id="{CDDF0107-2D27-914A-9F22-DFB09E04F050}" type="datetimeFigureOut">
               <a:rPr lang="en-US" smtClean="0"/>
-              <a:t>9/30/25</a:t>
+              <a:t>9/28/26</a:t>
             </a:fld>
             <a:endParaRPr lang="en-US"/>
           </a:p>
@@ -1396,7 +1399,7 @@
           <a:p>
             <a:fld id="{CDDF0107-2D27-914A-9F22-DFB09E04F050}" type="datetimeFigureOut">
               <a:rPr lang="en-US" smtClean="0"/>
-              <a:t>9/30/25</a:t>
+              <a:t>9/28/26</a:t>
             </a:fld>
             <a:endParaRPr lang="en-US"/>
           </a:p>
@@ -1671,7 +1674,7 @@
           <a:p>
             <a:fld id="{CDDF0107-2D27-914A-9F22-DFB09E04F050}" type="datetimeFigureOut">
               <a:rPr lang="en-US" smtClean="0"/>
-              <a:t>9/30/25</a:t>
+              <a:t>9/28/26</a:t>
             </a:fld>
             <a:endParaRPr lang="en-US"/>
           </a:p>
@@ -1936,7 +1939,7 @@
           <a:p>
             <a:fld id="{CDDF0107-2D27-914A-9F22-DFB09E04F050}" type="datetimeFigureOut">
               <a:rPr lang="en-US" smtClean="0"/>
-              <a:t>9/30/25</a:t>
+              <a:t>9/28/26</a:t>
             </a:fld>
             <a:endParaRPr lang="en-US"/>
           </a:p>
@@ -2348,7 +2351,7 @@
           <a:p>
             <a:fld id="{CDDF0107-2D27-914A-9F22-DFB09E04F050}" type="datetimeFigureOut">
               <a:rPr lang="en-US" smtClean="0"/>
-              <a:t>9/30/25</a:t>
+              <a:t>9/28/26</a:t>
             </a:fld>
             <a:endParaRPr lang="en-US"/>
           </a:p>
@@ -2489,7 +2492,7 @@
           <a:p>
             <a:fld id="{CDDF0107-2D27-914A-9F22-DFB09E04F050}" type="datetimeFigureOut">
               <a:rPr lang="en-US" smtClean="0"/>
-              <a:t>9/30/25</a:t>
+              <a:t>9/28/26</a:t>
             </a:fld>
             <a:endParaRPr lang="en-US"/>
           </a:p>
@@ -2602,7 +2605,7 @@
           <a:p>
             <a:fld id="{CDDF0107-2D27-914A-9F22-DFB09E04F050}" type="datetimeFigureOut">
               <a:rPr lang="en-US" smtClean="0"/>
-              <a:t>9/30/25</a:t>
+              <a:t>9/28/26</a:t>
             </a:fld>
             <a:endParaRPr lang="en-US"/>
           </a:p>
@@ -2913,7 +2916,7 @@
           <a:p>
             <a:fld id="{CDDF0107-2D27-914A-9F22-DFB09E04F050}" type="datetimeFigureOut">
               <a:rPr lang="en-US" smtClean="0"/>
-              <a:t>9/30/25</a:t>
+              <a:t>9/28/26</a:t>
             </a:fld>
             <a:endParaRPr lang="en-US"/>
           </a:p>
@@ -3201,7 +3204,7 @@
           <a:p>
             <a:fld id="{CDDF0107-2D27-914A-9F22-DFB09E04F050}" type="datetimeFigureOut">
               <a:rPr lang="en-US" smtClean="0"/>
-              <a:t>9/30/25</a:t>
+              <a:t>9/28/26</a:t>
             </a:fld>
             <a:endParaRPr lang="en-US"/>
           </a:p>
@@ -3442,7 +3445,7 @@
           <a:p>
             <a:fld id="{CDDF0107-2D27-914A-9F22-DFB09E04F050}" type="datetimeFigureOut">
               <a:rPr lang="en-US" smtClean="0"/>
-              <a:t>9/30/25</a:t>
+              <a:t>9/28/26</a:t>
             </a:fld>
             <a:endParaRPr lang="en-US"/>
           </a:p>
@@ -3873,8 +3876,8 @@
         </p:nvSpPr>
         <p:spPr>
           <a:xfrm>
-            <a:off x="1636285" y="1250762"/>
-            <a:ext cx="4062331" cy="5293757"/>
+            <a:off x="1507948" y="1122425"/>
+            <a:ext cx="6058069" cy="5293757"/>
           </a:xfrm>
           <a:prstGeom prst="rect">
             <a:avLst/>
@@ -3891,32 +3894,13 @@
               <a:rPr lang="en-US" sz="2600" b="1" dirty="0">
                 <a:latin typeface="Helvetica Light" panose="020B0403020202020204" pitchFamily="34" charset="0"/>
               </a:rPr>
-              <a:t>I. </a:t>
+              <a:t>I.  </a:t>
             </a:r>
             <a:r>
               <a:rPr lang="en-US" sz="2600" dirty="0">
                 <a:latin typeface="Helvetica Light" panose="020B0403020202020204" pitchFamily="34" charset="0"/>
               </a:rPr>
-              <a:t>First script</a:t>
-            </a:r>
-          </a:p>
-          <a:p>
-            <a:endParaRPr lang="en-US" sz="2600" dirty="0">
-              <a:latin typeface="Helvetica Light" panose="020B0403020202020204" pitchFamily="34" charset="0"/>
-            </a:endParaRPr>
-          </a:p>
-          <a:p>
-            <a:r>
-              <a:rPr lang="en-US" sz="2600" b="1" dirty="0">
-                <a:latin typeface="Helvetica Light" panose="020B0403020202020204" pitchFamily="34" charset="0"/>
-              </a:rPr>
-              <a:t>II.  </a:t>
-            </a:r>
-            <a:r>
-              <a:rPr lang="en-US" sz="2600" dirty="0">
-                <a:latin typeface="Helvetica Light" panose="020B0403020202020204" pitchFamily="34" charset="0"/>
-              </a:rPr>
-              <a:t>Strings, floats, integers</a:t>
+              <a:t>Scalar types: strings, floats, integers</a:t>
             </a:r>
           </a:p>
           <a:p>
@@ -3933,7 +3917,7 @@
               <a:rPr lang="en-US" sz="2600" b="1" dirty="0">
                 <a:latin typeface="Helvetica Light" panose="020B0403020202020204" pitchFamily="34" charset="0"/>
               </a:rPr>
-              <a:t>III. </a:t>
+              <a:t>II. </a:t>
             </a:r>
             <a:r>
               <a:rPr lang="en-US" sz="2600" dirty="0">
@@ -3956,13 +3940,13 @@
               <a:rPr lang="en-US" sz="2600" b="1" dirty="0">
                 <a:latin typeface="Helvetica Light" panose="020B0403020202020204" pitchFamily="34" charset="0"/>
               </a:rPr>
-              <a:t>IV. </a:t>
+              <a:t>III. </a:t>
             </a:r>
             <a:r>
               <a:rPr lang="en-US" sz="2600" dirty="0">
                 <a:latin typeface="Helvetica Light" panose="020B0403020202020204" pitchFamily="34" charset="0"/>
               </a:rPr>
-              <a:t>Interactive mode</a:t>
+              <a:t>Type conversion</a:t>
             </a:r>
           </a:p>
           <a:p>
@@ -3978,13 +3962,13 @@
               <a:rPr lang="en-US" sz="2600" b="1" dirty="0">
                 <a:latin typeface="Helvetica Light" panose="020B0403020202020204" pitchFamily="34" charset="0"/>
               </a:rPr>
-              <a:t>V.  </a:t>
+              <a:t>IV.  f</a:t>
             </a:r>
             <a:r>
               <a:rPr lang="en-US" sz="2600" dirty="0">
                 <a:latin typeface="Helvetica Light" panose="020B0403020202020204" pitchFamily="34" charset="0"/>
               </a:rPr>
-              <a:t>Float precision</a:t>
+              <a:t>-strings</a:t>
             </a:r>
           </a:p>
           <a:p>
@@ -3997,13 +3981,32 @@
               <a:rPr lang="en-US" sz="2600" b="1" dirty="0">
                 <a:latin typeface="Helvetica Light" panose="020B0403020202020204" pitchFamily="34" charset="0"/>
               </a:rPr>
-              <a:t>VI. </a:t>
+              <a:t>V. </a:t>
             </a:r>
             <a:r>
               <a:rPr lang="en-US" sz="2600" dirty="0">
                 <a:latin typeface="Helvetica Light" panose="020B0403020202020204" pitchFamily="34" charset="0"/>
               </a:rPr>
-              <a:t>Some practice scripts</a:t>
+              <a:t>Interactive Python/Jupyter</a:t>
+            </a:r>
+          </a:p>
+          <a:p>
+            <a:endParaRPr lang="en-US" sz="2600" dirty="0">
+              <a:latin typeface="Helvetica Light" panose="020B0403020202020204" pitchFamily="34" charset="0"/>
+            </a:endParaRPr>
+          </a:p>
+          <a:p>
+            <a:r>
+              <a:rPr lang="en-US" sz="2600" b="1" dirty="0">
+                <a:latin typeface="Helvetica Light" panose="020B0403020202020204" pitchFamily="34" charset="0"/>
+              </a:rPr>
+              <a:t>VI</a:t>
+            </a:r>
+            <a:r>
+              <a:rPr lang="en-US" sz="2600" dirty="0">
+                <a:latin typeface="Helvetica Light" panose="020B0403020202020204" pitchFamily="34" charset="0"/>
+              </a:rPr>
+              <a:t>. input()</a:t>
             </a:r>
           </a:p>
           <a:p>
@@ -4079,7 +4082,7 @@
         </p:nvSpPr>
         <p:spPr>
           <a:xfrm>
-            <a:off x="6381176" y="4362345"/>
+            <a:off x="8049555" y="3913166"/>
             <a:ext cx="3789820" cy="830997"/>
           </a:xfrm>
           <a:prstGeom prst="rect">
@@ -4150,7 +4153,7 @@
         </p:nvSpPr>
         <p:spPr>
           <a:xfrm>
-            <a:off x="6381176" y="3283114"/>
+            <a:off x="8049555" y="2833935"/>
             <a:ext cx="2084225" cy="461665"/>
           </a:xfrm>
           <a:prstGeom prst="rect">
@@ -4215,10 +4218,10 @@
       </p:grpSpPr>
       <p:sp>
         <p:nvSpPr>
-          <p:cNvPr id="2" name="TextBox 1">
-            <a:extLst>
-              <a:ext uri="{FF2B5EF4-FFF2-40B4-BE49-F238E27FC236}">
-                <a16:creationId xmlns:a16="http://schemas.microsoft.com/office/drawing/2014/main" id="{090BC4A2-9B62-A242-A5D4-64C574932116}"/>
+          <p:cNvPr id="3" name="TextBox 2">
+            <a:extLst>
+              <a:ext uri="{FF2B5EF4-FFF2-40B4-BE49-F238E27FC236}">
+                <a16:creationId xmlns:a16="http://schemas.microsoft.com/office/drawing/2014/main" id="{623CF459-0F89-D345-AA63-7A331BEB4ACC}"/>
               </a:ext>
             </a:extLst>
           </p:cNvPr>
@@ -4227,8 +4230,8 @@
         </p:nvSpPr>
         <p:spPr>
           <a:xfrm>
-            <a:off x="2691497" y="449207"/>
-            <a:ext cx="3147015" cy="600164"/>
+            <a:off x="793218" y="490037"/>
+            <a:ext cx="9781845" cy="1031051"/>
           </a:xfrm>
           <a:prstGeom prst="rect">
             <a:avLst/>
@@ -4241,124 +4244,40 @@
           </a:bodyPr>
           <a:lstStyle/>
           <a:p>
+            <a:pPr algn="ctr"/>
             <a:r>
               <a:rPr lang="en-US" sz="3300" b="1" dirty="0">
-                <a:latin typeface="Helvetica Light" panose="020B0403020202020204" pitchFamily="34" charset="0"/>
-              </a:rPr>
-              <a:t>help() and </a:t>
-            </a:r>
-            <a:r>
-              <a:rPr lang="en-US" sz="3300" b="1" dirty="0" err="1">
-                <a:latin typeface="Helvetica Light" panose="020B0403020202020204" pitchFamily="34" charset="0"/>
-              </a:rPr>
-              <a:t>dir</a:t>
-            </a:r>
-            <a:r>
-              <a:rPr lang="en-US" sz="3300" b="1" dirty="0">
-                <a:latin typeface="Helvetica Light" panose="020B0403020202020204" pitchFamily="34" charset="0"/>
-              </a:rPr>
-              <a:t>()</a:t>
-            </a:r>
-          </a:p>
-        </p:txBody>
-      </p:sp>
-      <p:sp>
-        <p:nvSpPr>
-          <p:cNvPr id="3" name="Rectangle 2">
-            <a:extLst>
-              <a:ext uri="{FF2B5EF4-FFF2-40B4-BE49-F238E27FC236}">
-                <a16:creationId xmlns:a16="http://schemas.microsoft.com/office/drawing/2014/main" id="{AE512135-4E26-EA4B-8F81-2F5B981B57B4}"/>
-              </a:ext>
-            </a:extLst>
-          </p:cNvPr>
-          <p:cNvSpPr/>
+                <a:latin typeface="HELVETICA LIGHT" panose="020B0403020202020204" pitchFamily="34" charset="0"/>
+              </a:rPr>
+              <a:t>Formatting Output with f-strings</a:t>
+            </a:r>
+          </a:p>
+          <a:p>
+            <a:r>
+              <a:rPr lang="en-US" sz="2800" dirty="0">
+                <a:latin typeface="Helvetica Light" panose="020B0403020202020204" pitchFamily="34" charset="0"/>
+              </a:rPr>
+              <a:t>Combine text and variables to create clear, readable output</a:t>
+            </a:r>
+          </a:p>
+        </p:txBody>
+      </p:sp>
+      <p:sp>
+        <p:nvSpPr>
+          <p:cNvPr id="8" name="TextBox 7">
+            <a:extLst>
+              <a:ext uri="{FF2B5EF4-FFF2-40B4-BE49-F238E27FC236}">
+                <a16:creationId xmlns:a16="http://schemas.microsoft.com/office/drawing/2014/main" id="{DF1DA4CF-8554-4D33-D1A5-5027321464FF}"/>
+              </a:ext>
+            </a:extLst>
+          </p:cNvPr>
+          <p:cNvSpPr txBox="1"/>
           <p:nvPr/>
         </p:nvSpPr>
         <p:spPr>
           <a:xfrm>
-            <a:off x="1370622" y="1452770"/>
-            <a:ext cx="7830990" cy="830997"/>
-          </a:xfrm>
-          <a:prstGeom prst="rect">
-            <a:avLst/>
-          </a:prstGeom>
-        </p:spPr>
-        <p:txBody>
-          <a:bodyPr wrap="none">
-            <a:spAutoFit/>
-          </a:bodyPr>
-          <a:lstStyle/>
-          <a:p>
-            <a:r>
-              <a:rPr lang="en-US" sz="2600" dirty="0">
-                <a:latin typeface="Courier New" panose="02070309020205020404" pitchFamily="49" charset="0"/>
-                <a:cs typeface="Courier New" panose="02070309020205020404" pitchFamily="49" charset="0"/>
-              </a:rPr>
-              <a:t>help(str)		</a:t>
-            </a:r>
-          </a:p>
-          <a:p>
-            <a:r>
-              <a:rPr lang="en-US" sz="2200" dirty="0">
-                <a:latin typeface="Courier New" panose="02070309020205020404" pitchFamily="49" charset="0"/>
-                <a:cs typeface="Courier New" panose="02070309020205020404" pitchFamily="49" charset="0"/>
-              </a:rPr>
-              <a:t># provides brief description of str functions</a:t>
-            </a:r>
-            <a:endParaRPr lang="en-US" sz="2200" dirty="0">
-              <a:effectLst/>
-              <a:latin typeface="Courier New" panose="02070309020205020404" pitchFamily="49" charset="0"/>
-              <a:cs typeface="Courier New" panose="02070309020205020404" pitchFamily="49" charset="0"/>
-            </a:endParaRPr>
-          </a:p>
-        </p:txBody>
-      </p:sp>
-      <p:pic>
-        <p:nvPicPr>
-          <p:cNvPr id="6" name="Picture 5" descr="A blackboard sign on a wall&#10;&#10;Description automatically generated">
-            <a:extLst>
-              <a:ext uri="{FF2B5EF4-FFF2-40B4-BE49-F238E27FC236}">
-                <a16:creationId xmlns:a16="http://schemas.microsoft.com/office/drawing/2014/main" id="{CB5ED61C-480B-1F4F-BC6B-08EE1FCCC2BD}"/>
-              </a:ext>
-            </a:extLst>
-          </p:cNvPr>
-          <p:cNvPicPr>
-            <a:picLocks noChangeAspect="1"/>
-          </p:cNvPicPr>
-          <p:nvPr/>
-        </p:nvPicPr>
-        <p:blipFill>
-          <a:blip r:embed="rId2"/>
-          <a:stretch>
-            <a:fillRect/>
-          </a:stretch>
-        </p:blipFill>
-        <p:spPr>
-          <a:xfrm>
-            <a:off x="1062817" y="2699692"/>
-            <a:ext cx="6279559" cy="3721627"/>
-          </a:xfrm>
-          <a:prstGeom prst="rect">
-            <a:avLst/>
-          </a:prstGeom>
-        </p:spPr>
-      </p:pic>
-      <p:sp>
-        <p:nvSpPr>
-          <p:cNvPr id="7" name="TextBox 6">
-            <a:extLst>
-              <a:ext uri="{FF2B5EF4-FFF2-40B4-BE49-F238E27FC236}">
-                <a16:creationId xmlns:a16="http://schemas.microsoft.com/office/drawing/2014/main" id="{595CAE82-27F4-714B-9EFF-7CC1DE322C4C}"/>
-              </a:ext>
-            </a:extLst>
-          </p:cNvPr>
-          <p:cNvSpPr txBox="1"/>
-          <p:nvPr/>
-        </p:nvSpPr>
-        <p:spPr>
-          <a:xfrm>
-            <a:off x="7512689" y="3690730"/>
-            <a:ext cx="4483842" cy="1369606"/>
+            <a:off x="1275145" y="2310471"/>
+            <a:ext cx="9641710" cy="1384995"/>
           </a:xfrm>
           <a:prstGeom prst="rect">
             <a:avLst/>
@@ -4366,34 +4285,230 @@
           <a:noFill/>
         </p:spPr>
         <p:txBody>
-          <a:bodyPr wrap="square" rtlCol="0">
+          <a:bodyPr wrap="square">
             <a:spAutoFit/>
           </a:bodyPr>
           <a:lstStyle/>
           <a:p>
             <a:r>
-              <a:rPr lang="en-US" sz="2400" dirty="0">
-                <a:latin typeface="Helvetica Light" panose="020B0403020202020204" pitchFamily="34" charset="0"/>
-              </a:rPr>
-              <a:t>Hitting tab after variable name followed by </a:t>
-            </a:r>
-            <a:r>
-              <a:rPr lang="en-US" sz="3500" b="1" dirty="0">
-                <a:latin typeface="Helvetica Light" panose="020B0403020202020204" pitchFamily="34" charset="0"/>
-              </a:rPr>
-              <a:t>.</a:t>
-            </a:r>
-            <a:r>
-              <a:rPr lang="en-US" sz="2400" b="1" dirty="0">
-                <a:latin typeface="Helvetica Light" panose="020B0403020202020204" pitchFamily="34" charset="0"/>
-              </a:rPr>
-              <a:t> </a:t>
-            </a:r>
-            <a:r>
-              <a:rPr lang="en-US" sz="2400" dirty="0">
-                <a:latin typeface="Helvetica Light" panose="020B0403020202020204" pitchFamily="34" charset="0"/>
-              </a:rPr>
-              <a:t>will list methods available to that variable.</a:t>
+              <a:rPr lang="en-US" sz="2800" dirty="0">
+                <a:latin typeface="Courier New" panose="02070309020205020404" pitchFamily="49" charset="0"/>
+                <a:cs typeface="Courier New" panose="02070309020205020404" pitchFamily="49" charset="0"/>
+              </a:rPr>
+              <a:t>name = </a:t>
+            </a:r>
+            <a:r>
+              <a:rPr lang="en-US" sz="2800" dirty="0">
+                <a:solidFill>
+                  <a:srgbClr val="FF0000"/>
+                </a:solidFill>
+                <a:latin typeface="Courier New" panose="02070309020205020404" pitchFamily="49" charset="0"/>
+                <a:cs typeface="Courier New" panose="02070309020205020404" pitchFamily="49" charset="0"/>
+              </a:rPr>
+              <a:t>"Lebron"</a:t>
+            </a:r>
+          </a:p>
+          <a:p>
+            <a:r>
+              <a:rPr lang="en-US" sz="2800" dirty="0">
+                <a:latin typeface="Courier New" panose="02070309020205020404" pitchFamily="49" charset="0"/>
+                <a:cs typeface="Courier New" panose="02070309020205020404" pitchFamily="49" charset="0"/>
+              </a:rPr>
+              <a:t>points = </a:t>
+            </a:r>
+            <a:r>
+              <a:rPr lang="en-US" sz="2800" dirty="0">
+                <a:solidFill>
+                  <a:schemeClr val="accent1">
+                    <a:lumMod val="75000"/>
+                  </a:schemeClr>
+                </a:solidFill>
+                <a:latin typeface="Courier New" panose="02070309020205020404" pitchFamily="49" charset="0"/>
+                <a:cs typeface="Courier New" panose="02070309020205020404" pitchFamily="49" charset="0"/>
+              </a:rPr>
+              <a:t>38</a:t>
+            </a:r>
+          </a:p>
+          <a:p>
+            <a:r>
+              <a:rPr lang="en-US" sz="2800" dirty="0">
+                <a:latin typeface="Courier New" panose="02070309020205020404" pitchFamily="49" charset="0"/>
+                <a:cs typeface="Courier New" panose="02070309020205020404" pitchFamily="49" charset="0"/>
+              </a:rPr>
+              <a:t>print(</a:t>
+            </a:r>
+            <a:r>
+              <a:rPr lang="en-US" sz="2800" dirty="0">
+                <a:solidFill>
+                  <a:srgbClr val="FF0000"/>
+                </a:solidFill>
+                <a:latin typeface="Courier New" panose="02070309020205020404" pitchFamily="49" charset="0"/>
+                <a:cs typeface="Courier New" panose="02070309020205020404" pitchFamily="49" charset="0"/>
+              </a:rPr>
+              <a:t>f"</a:t>
+            </a:r>
+            <a:r>
+              <a:rPr lang="en-US" sz="2800" dirty="0">
+                <a:latin typeface="Courier New" panose="02070309020205020404" pitchFamily="49" charset="0"/>
+                <a:cs typeface="Courier New" panose="02070309020205020404" pitchFamily="49" charset="0"/>
+              </a:rPr>
+              <a:t>{name} </a:t>
+            </a:r>
+            <a:r>
+              <a:rPr lang="en-US" sz="2800" dirty="0">
+                <a:solidFill>
+                  <a:srgbClr val="FF0000"/>
+                </a:solidFill>
+                <a:latin typeface="Courier New" panose="02070309020205020404" pitchFamily="49" charset="0"/>
+                <a:cs typeface="Courier New" panose="02070309020205020404" pitchFamily="49" charset="0"/>
+              </a:rPr>
+              <a:t>scored</a:t>
+            </a:r>
+            <a:r>
+              <a:rPr lang="en-US" sz="2800" dirty="0">
+                <a:latin typeface="Courier New" panose="02070309020205020404" pitchFamily="49" charset="0"/>
+                <a:cs typeface="Courier New" panose="02070309020205020404" pitchFamily="49" charset="0"/>
+              </a:rPr>
+              <a:t> {points} </a:t>
+            </a:r>
+            <a:r>
+              <a:rPr lang="en-US" sz="2800" dirty="0">
+                <a:solidFill>
+                  <a:srgbClr val="FF0000"/>
+                </a:solidFill>
+                <a:latin typeface="Courier New" panose="02070309020205020404" pitchFamily="49" charset="0"/>
+                <a:cs typeface="Courier New" panose="02070309020205020404" pitchFamily="49" charset="0"/>
+              </a:rPr>
+              <a:t>points"</a:t>
+            </a:r>
+            <a:r>
+              <a:rPr lang="en-US" sz="2800" dirty="0">
+                <a:latin typeface="Courier New" panose="02070309020205020404" pitchFamily="49" charset="0"/>
+                <a:cs typeface="Courier New" panose="02070309020205020404" pitchFamily="49" charset="0"/>
+              </a:rPr>
+              <a:t>)</a:t>
+            </a:r>
+          </a:p>
+        </p:txBody>
+      </p:sp>
+      <p:sp>
+        <p:nvSpPr>
+          <p:cNvPr id="9" name="TextBox 8">
+            <a:extLst>
+              <a:ext uri="{FF2B5EF4-FFF2-40B4-BE49-F238E27FC236}">
+                <a16:creationId xmlns:a16="http://schemas.microsoft.com/office/drawing/2014/main" id="{59029943-87FF-3E04-C158-D8D4A44F8A26}"/>
+              </a:ext>
+            </a:extLst>
+          </p:cNvPr>
+          <p:cNvSpPr txBox="1"/>
+          <p:nvPr/>
+        </p:nvSpPr>
+        <p:spPr>
+          <a:xfrm>
+            <a:off x="1275145" y="4646895"/>
+            <a:ext cx="9641710" cy="954107"/>
+          </a:xfrm>
+          <a:prstGeom prst="rect">
+            <a:avLst/>
+          </a:prstGeom>
+          <a:noFill/>
+        </p:spPr>
+        <p:txBody>
+          <a:bodyPr wrap="square">
+            <a:spAutoFit/>
+          </a:bodyPr>
+          <a:lstStyle/>
+          <a:p>
+            <a:r>
+              <a:rPr lang="en-US" sz="2800" dirty="0">
+                <a:latin typeface="Courier New" panose="02070309020205020404" pitchFamily="49" charset="0"/>
+                <a:cs typeface="Courier New" panose="02070309020205020404" pitchFamily="49" charset="0"/>
+              </a:rPr>
+              <a:t>value = 2 / </a:t>
+            </a:r>
+            <a:r>
+              <a:rPr lang="en-US" sz="2800" dirty="0">
+                <a:solidFill>
+                  <a:schemeClr val="accent1">
+                    <a:lumMod val="75000"/>
+                  </a:schemeClr>
+                </a:solidFill>
+                <a:latin typeface="Courier New" panose="02070309020205020404" pitchFamily="49" charset="0"/>
+                <a:cs typeface="Courier New" panose="02070309020205020404" pitchFamily="49" charset="0"/>
+              </a:rPr>
+              <a:t>3</a:t>
+            </a:r>
+          </a:p>
+          <a:p>
+            <a:r>
+              <a:rPr lang="en-US" sz="2800" dirty="0">
+                <a:latin typeface="Courier New" panose="02070309020205020404" pitchFamily="49" charset="0"/>
+                <a:cs typeface="Courier New" panose="02070309020205020404" pitchFamily="49" charset="0"/>
+              </a:rPr>
+              <a:t>print(</a:t>
+            </a:r>
+            <a:r>
+              <a:rPr lang="en-US" sz="2800" dirty="0" err="1">
+                <a:solidFill>
+                  <a:srgbClr val="FF0000"/>
+                </a:solidFill>
+                <a:latin typeface="Courier New" panose="02070309020205020404" pitchFamily="49" charset="0"/>
+                <a:cs typeface="Courier New" panose="02070309020205020404" pitchFamily="49" charset="0"/>
+              </a:rPr>
+              <a:t>f"Value</a:t>
+            </a:r>
+            <a:r>
+              <a:rPr lang="en-US" sz="2800" dirty="0">
+                <a:solidFill>
+                  <a:srgbClr val="FF0000"/>
+                </a:solidFill>
+                <a:latin typeface="Courier New" panose="02070309020205020404" pitchFamily="49" charset="0"/>
+                <a:cs typeface="Courier New" panose="02070309020205020404" pitchFamily="49" charset="0"/>
+              </a:rPr>
+              <a:t> = </a:t>
+            </a:r>
+            <a:r>
+              <a:rPr lang="en-US" sz="2800" dirty="0">
+                <a:latin typeface="Courier New" panose="02070309020205020404" pitchFamily="49" charset="0"/>
+                <a:cs typeface="Courier New" panose="02070309020205020404" pitchFamily="49" charset="0"/>
+              </a:rPr>
+              <a:t>{value:</a:t>
+            </a:r>
+            <a:r>
+              <a:rPr lang="en-US" sz="2800" dirty="0">
+                <a:solidFill>
+                  <a:schemeClr val="accent1">
+                    <a:lumMod val="75000"/>
+                  </a:schemeClr>
+                </a:solidFill>
+                <a:latin typeface="Courier New" panose="02070309020205020404" pitchFamily="49" charset="0"/>
+                <a:cs typeface="Courier New" panose="02070309020205020404" pitchFamily="49" charset="0"/>
+              </a:rPr>
+              <a:t>.3</a:t>
+            </a:r>
+            <a:r>
+              <a:rPr lang="en-US" sz="2800" dirty="0">
+                <a:latin typeface="Courier New" panose="02070309020205020404" pitchFamily="49" charset="0"/>
+                <a:cs typeface="Courier New" panose="02070309020205020404" pitchFamily="49" charset="0"/>
+              </a:rPr>
+              <a:t>f}</a:t>
+            </a:r>
+            <a:r>
+              <a:rPr lang="en-US" sz="2800" dirty="0">
+                <a:solidFill>
+                  <a:srgbClr val="FF0000"/>
+                </a:solidFill>
+                <a:latin typeface="Courier New" panose="02070309020205020404" pitchFamily="49" charset="0"/>
+                <a:cs typeface="Courier New" panose="02070309020205020404" pitchFamily="49" charset="0"/>
+              </a:rPr>
+              <a:t>"</a:t>
+            </a:r>
+            <a:r>
+              <a:rPr lang="en-US" sz="2800" dirty="0">
+                <a:latin typeface="Courier New" panose="02070309020205020404" pitchFamily="49" charset="0"/>
+                <a:cs typeface="Courier New" panose="02070309020205020404" pitchFamily="49" charset="0"/>
+              </a:rPr>
+              <a:t>)</a:t>
             </a:r>
           </a:p>
         </p:txBody>
@@ -4401,7 +4516,7 @@
     </p:spTree>
     <p:extLst>
       <p:ext uri="{BB962C8B-B14F-4D97-AF65-F5344CB8AC3E}">
-        <p14:creationId xmlns:p14="http://schemas.microsoft.com/office/powerpoint/2010/main" val="1300954205"/>
+        <p14:creationId xmlns:p14="http://schemas.microsoft.com/office/powerpoint/2010/main" val="1979023920"/>
       </p:ext>
     </p:extLst>
   </p:cSld>
@@ -4430,25 +4545,1010 @@
       </p:grpSpPr>
       <p:sp>
         <p:nvSpPr>
-          <p:cNvPr id="2" name="Rectangle 1">
-            <a:extLst>
-              <a:ext uri="{FF2B5EF4-FFF2-40B4-BE49-F238E27FC236}">
-                <a16:creationId xmlns:a16="http://schemas.microsoft.com/office/drawing/2014/main" id="{C0DC5892-0CFC-524E-BB4E-0851726A9AE2}"/>
-              </a:ext>
-            </a:extLst>
-          </p:cNvPr>
-          <p:cNvSpPr/>
+          <p:cNvPr id="2" name="TextBox 1">
+            <a:extLst>
+              <a:ext uri="{FF2B5EF4-FFF2-40B4-BE49-F238E27FC236}">
+                <a16:creationId xmlns:a16="http://schemas.microsoft.com/office/drawing/2014/main" id="{090BC4A2-9B62-A242-A5D4-64C574932116}"/>
+              </a:ext>
+            </a:extLst>
+          </p:cNvPr>
+          <p:cNvSpPr txBox="1"/>
           <p:nvPr/>
         </p:nvSpPr>
         <p:spPr>
           <a:xfrm>
-            <a:off x="457200" y="399030"/>
-            <a:ext cx="10849232" cy="3816429"/>
+            <a:off x="2643370" y="237965"/>
+            <a:ext cx="7455887" cy="1015663"/>
+          </a:xfrm>
+          <a:prstGeom prst="rect">
+            <a:avLst/>
+          </a:prstGeom>
+          <a:noFill/>
+        </p:spPr>
+        <p:txBody>
+          <a:bodyPr wrap="none" rtlCol="0">
+            <a:spAutoFit/>
+          </a:bodyPr>
+          <a:lstStyle/>
+          <a:p>
+            <a:r>
+              <a:rPr lang="en-US" sz="3200" b="1" dirty="0">
+                <a:latin typeface="Helvetica Light" panose="020B0403020202020204" pitchFamily="34" charset="0"/>
+              </a:rPr>
+              <a:t>Exploring python: type(), help() and </a:t>
+            </a:r>
+            <a:r>
+              <a:rPr lang="en-US" sz="3200" b="1" dirty="0" err="1">
+                <a:latin typeface="Helvetica Light" panose="020B0403020202020204" pitchFamily="34" charset="0"/>
+              </a:rPr>
+              <a:t>dir</a:t>
+            </a:r>
+            <a:r>
+              <a:rPr lang="en-US" sz="3200" b="1" dirty="0">
+                <a:latin typeface="Helvetica Light" panose="020B0403020202020204" pitchFamily="34" charset="0"/>
+              </a:rPr>
+              <a:t>()</a:t>
+            </a:r>
+          </a:p>
+          <a:p>
+            <a:pPr algn="ctr"/>
+            <a:r>
+              <a:rPr lang="en-US" sz="2800" b="1" dirty="0">
+                <a:latin typeface="Helvetica Light" panose="020B0403020202020204" pitchFamily="34" charset="0"/>
+              </a:rPr>
+              <a:t>What is an object, and what can I do with it?</a:t>
+            </a:r>
+          </a:p>
+        </p:txBody>
+      </p:sp>
+      <p:graphicFrame>
+        <p:nvGraphicFramePr>
+          <p:cNvPr id="4" name="Table 3">
+            <a:extLst>
+              <a:ext uri="{FF2B5EF4-FFF2-40B4-BE49-F238E27FC236}">
+                <a16:creationId xmlns:a16="http://schemas.microsoft.com/office/drawing/2014/main" id="{0F8A9B3A-DE19-0F8D-A034-DBD39392B033}"/>
+              </a:ext>
+            </a:extLst>
+          </p:cNvPr>
+          <p:cNvGraphicFramePr>
+            <a:graphicFrameLocks noGrp="1"/>
+          </p:cNvGraphicFramePr>
+          <p:nvPr>
+            <p:extLst>
+              <p:ext uri="{D42A27DB-BD31-4B8C-83A1-F6EECF244321}">
+                <p14:modId xmlns:p14="http://schemas.microsoft.com/office/powerpoint/2010/main" val="1008306326"/>
+              </p:ext>
+            </p:extLst>
+          </p:nvPr>
+        </p:nvGraphicFramePr>
+        <p:xfrm>
+          <a:off x="545431" y="1532824"/>
+          <a:ext cx="11101137" cy="2286000"/>
+        </p:xfrm>
+        <a:graphic>
+          <a:graphicData uri="http://schemas.openxmlformats.org/drawingml/2006/table">
+            <a:tbl>
+              <a:tblPr>
+                <a:tableStyleId>{5C22544A-7EE6-4342-B048-85BDC9FD1C3A}</a:tableStyleId>
+              </a:tblPr>
+              <a:tblGrid>
+                <a:gridCol w="3700379">
+                  <a:extLst>
+                    <a:ext uri="{9D8B030D-6E8A-4147-A177-3AD203B41FA5}">
+                      <a16:colId xmlns:a16="http://schemas.microsoft.com/office/drawing/2014/main" val="2630499926"/>
+                    </a:ext>
+                  </a:extLst>
+                </a:gridCol>
+                <a:gridCol w="3700379">
+                  <a:extLst>
+                    <a:ext uri="{9D8B030D-6E8A-4147-A177-3AD203B41FA5}">
+                      <a16:colId xmlns:a16="http://schemas.microsoft.com/office/drawing/2014/main" val="3140850162"/>
+                    </a:ext>
+                  </a:extLst>
+                </a:gridCol>
+                <a:gridCol w="3700379">
+                  <a:extLst>
+                    <a:ext uri="{9D8B030D-6E8A-4147-A177-3AD203B41FA5}">
+                      <a16:colId xmlns:a16="http://schemas.microsoft.com/office/drawing/2014/main" val="1619992395"/>
+                    </a:ext>
+                  </a:extLst>
+                </a:gridCol>
+              </a:tblGrid>
+              <a:tr h="0">
+                <a:tc>
+                  <a:txBody>
+                    <a:bodyPr/>
+                    <a:lstStyle/>
+                    <a:p>
+                      <a:pPr>
+                        <a:buNone/>
+                      </a:pPr>
+                      <a:r>
+                        <a:rPr lang="en-US" sz="2200" b="1" i="0" dirty="0">
+                          <a:effectLst/>
+                          <a:latin typeface="Helvetica Light" panose="020B0403020202020204" pitchFamily="34" charset="0"/>
+                        </a:rPr>
+                        <a:t>What is it?</a:t>
+                      </a:r>
+                    </a:p>
+                  </a:txBody>
+                  <a:tcPr marL="114300" marR="114300" marT="76200" marB="76200" anchor="ctr"/>
+                </a:tc>
+                <a:tc>
+                  <a:txBody>
+                    <a:bodyPr/>
+                    <a:lstStyle/>
+                    <a:p>
+                      <a:pPr>
+                        <a:buNone/>
+                      </a:pPr>
+                      <a:r>
+                        <a:rPr lang="en-US" sz="2200" b="1" i="0">
+                          <a:effectLst/>
+                          <a:latin typeface="Helvetica Light" panose="020B0403020202020204" pitchFamily="34" charset="0"/>
+                        </a:rPr>
+                        <a:t>What can it do?</a:t>
+                      </a:r>
+                    </a:p>
+                  </a:txBody>
+                  <a:tcPr marL="114300" marR="114300" marT="76200" marB="76200" anchor="ctr"/>
+                </a:tc>
+                <a:tc>
+                  <a:txBody>
+                    <a:bodyPr/>
+                    <a:lstStyle/>
+                    <a:p>
+                      <a:pPr>
+                        <a:buNone/>
+                      </a:pPr>
+                      <a:r>
+                        <a:rPr lang="en-US" sz="2200" b="1" i="0" dirty="0">
+                          <a:effectLst/>
+                          <a:latin typeface="Helvetica Light" panose="020B0403020202020204" pitchFamily="34" charset="0"/>
+                        </a:rPr>
+                        <a:t>How does it work?</a:t>
+                      </a:r>
+                    </a:p>
+                  </a:txBody>
+                  <a:tcPr marL="114300" marR="114300" marT="76200" marB="76200" anchor="ctr"/>
+                </a:tc>
+                <a:extLst>
+                  <a:ext uri="{0D108BD9-81ED-4DB2-BD59-A6C34878D82A}">
+                    <a16:rowId xmlns:a16="http://schemas.microsoft.com/office/drawing/2014/main" val="323643452"/>
+                  </a:ext>
+                </a:extLst>
+              </a:tr>
+              <a:tr h="0">
+                <a:tc>
+                  <a:txBody>
+                    <a:bodyPr/>
+                    <a:lstStyle/>
+                    <a:p>
+                      <a:pPr>
+                        <a:buNone/>
+                      </a:pPr>
+                      <a:r>
+                        <a:rPr lang="en-US" sz="2200" b="0" i="0" dirty="0">
+                          <a:effectLst/>
+                          <a:latin typeface="Courier New" panose="02070309020205020404" pitchFamily="49" charset="0"/>
+                          <a:cs typeface="Courier New" panose="02070309020205020404" pitchFamily="49" charset="0"/>
+                        </a:rPr>
+                        <a:t>type()</a:t>
+                      </a:r>
+                    </a:p>
+                  </a:txBody>
+                  <a:tcPr marL="114300" marR="114300" marT="76200" marB="76200" anchor="ctr"/>
+                </a:tc>
+                <a:tc>
+                  <a:txBody>
+                    <a:bodyPr/>
+                    <a:lstStyle/>
+                    <a:p>
+                      <a:pPr>
+                        <a:buNone/>
+                      </a:pPr>
+                      <a:r>
+                        <a:rPr lang="en-US" sz="2200" b="0" i="0">
+                          <a:effectLst/>
+                          <a:latin typeface="Courier New" panose="02070309020205020404" pitchFamily="49" charset="0"/>
+                          <a:cs typeface="Courier New" panose="02070309020205020404" pitchFamily="49" charset="0"/>
+                        </a:rPr>
+                        <a:t>dir()</a:t>
+                      </a:r>
+                    </a:p>
+                  </a:txBody>
+                  <a:tcPr marL="114300" marR="114300" marT="76200" marB="76200" anchor="ctr"/>
+                </a:tc>
+                <a:tc>
+                  <a:txBody>
+                    <a:bodyPr/>
+                    <a:lstStyle/>
+                    <a:p>
+                      <a:pPr>
+                        <a:buNone/>
+                      </a:pPr>
+                      <a:r>
+                        <a:rPr lang="en-US" sz="2200" b="0" i="0" dirty="0">
+                          <a:effectLst/>
+                          <a:latin typeface="Courier New" panose="02070309020205020404" pitchFamily="49" charset="0"/>
+                          <a:cs typeface="Courier New" panose="02070309020205020404" pitchFamily="49" charset="0"/>
+                        </a:rPr>
+                        <a:t>help()</a:t>
+                      </a:r>
+                    </a:p>
+                  </a:txBody>
+                  <a:tcPr marL="114300" marR="114300" marT="76200" marB="76200" anchor="ctr"/>
+                </a:tc>
+                <a:extLst>
+                  <a:ext uri="{0D108BD9-81ED-4DB2-BD59-A6C34878D82A}">
+                    <a16:rowId xmlns:a16="http://schemas.microsoft.com/office/drawing/2014/main" val="2294221672"/>
+                  </a:ext>
+                </a:extLst>
+              </a:tr>
+              <a:tr h="0">
+                <a:tc>
+                  <a:txBody>
+                    <a:bodyPr/>
+                    <a:lstStyle/>
+                    <a:p>
+                      <a:pPr>
+                        <a:buNone/>
+                      </a:pPr>
+                      <a:r>
+                        <a:rPr lang="en-US" sz="2200" b="0" i="0" dirty="0">
+                          <a:effectLst/>
+                          <a:latin typeface="Helvetica Light" panose="020B0403020202020204" pitchFamily="34" charset="0"/>
+                        </a:rPr>
+                        <a:t>Identify the type of an object</a:t>
+                      </a:r>
+                    </a:p>
+                  </a:txBody>
+                  <a:tcPr marL="114300" marR="114300" marT="76200" marB="76200" anchor="ctr"/>
+                </a:tc>
+                <a:tc>
+                  <a:txBody>
+                    <a:bodyPr/>
+                    <a:lstStyle/>
+                    <a:p>
+                      <a:pPr>
+                        <a:buNone/>
+                      </a:pPr>
+                      <a:r>
+                        <a:rPr lang="en-US" sz="2200" b="0" i="0">
+                          <a:effectLst/>
+                          <a:latin typeface="Helvetica Light" panose="020B0403020202020204" pitchFamily="34" charset="0"/>
+                        </a:rPr>
+                        <a:t>See available methods</a:t>
+                      </a:r>
+                    </a:p>
+                  </a:txBody>
+                  <a:tcPr marL="114300" marR="114300" marT="76200" marB="76200" anchor="ctr"/>
+                </a:tc>
+                <a:tc>
+                  <a:txBody>
+                    <a:bodyPr/>
+                    <a:lstStyle/>
+                    <a:p>
+                      <a:pPr>
+                        <a:buNone/>
+                      </a:pPr>
+                      <a:r>
+                        <a:rPr lang="en-US" sz="2200" b="0" i="0">
+                          <a:effectLst/>
+                          <a:latin typeface="Helvetica Light" panose="020B0403020202020204" pitchFamily="34" charset="0"/>
+                        </a:rPr>
+                        <a:t>Learn how a method works</a:t>
+                      </a:r>
+                    </a:p>
+                  </a:txBody>
+                  <a:tcPr marL="114300" marR="114300" marT="76200" marB="76200" anchor="ctr"/>
+                </a:tc>
+                <a:extLst>
+                  <a:ext uri="{0D108BD9-81ED-4DB2-BD59-A6C34878D82A}">
+                    <a16:rowId xmlns:a16="http://schemas.microsoft.com/office/drawing/2014/main" val="211813687"/>
+                  </a:ext>
+                </a:extLst>
+              </a:tr>
+              <a:tr h="0">
+                <a:tc>
+                  <a:txBody>
+                    <a:bodyPr/>
+                    <a:lstStyle/>
+                    <a:p>
+                      <a:pPr>
+                        <a:buNone/>
+                      </a:pPr>
+                      <a:r>
+                        <a:rPr lang="en-US" sz="2200" b="0" i="0">
+                          <a:effectLst/>
+                          <a:latin typeface="Courier New" panose="02070309020205020404" pitchFamily="49" charset="0"/>
+                          <a:cs typeface="Courier New" panose="02070309020205020404" pitchFamily="49" charset="0"/>
+                        </a:rPr>
+                        <a:t>type(seq)</a:t>
+                      </a:r>
+                    </a:p>
+                  </a:txBody>
+                  <a:tcPr marL="114300" marR="114300" marT="76200" marB="76200" anchor="ctr"/>
+                </a:tc>
+                <a:tc>
+                  <a:txBody>
+                    <a:bodyPr/>
+                    <a:lstStyle/>
+                    <a:p>
+                      <a:pPr>
+                        <a:buNone/>
+                      </a:pPr>
+                      <a:r>
+                        <a:rPr lang="en-US" sz="2200" b="0" i="0">
+                          <a:effectLst/>
+                          <a:latin typeface="Courier New" panose="02070309020205020404" pitchFamily="49" charset="0"/>
+                          <a:cs typeface="Courier New" panose="02070309020205020404" pitchFamily="49" charset="0"/>
+                        </a:rPr>
+                        <a:t>dir(seq)</a:t>
+                      </a:r>
+                    </a:p>
+                  </a:txBody>
+                  <a:tcPr marL="114300" marR="114300" marT="76200" marB="76200" anchor="ctr"/>
+                </a:tc>
+                <a:tc>
+                  <a:txBody>
+                    <a:bodyPr/>
+                    <a:lstStyle/>
+                    <a:p>
+                      <a:pPr>
+                        <a:buNone/>
+                      </a:pPr>
+                      <a:r>
+                        <a:rPr lang="en-US" sz="2200" b="0" i="0" dirty="0">
+                          <a:effectLst/>
+                          <a:latin typeface="Courier New" panose="02070309020205020404" pitchFamily="49" charset="0"/>
+                          <a:cs typeface="Courier New" panose="02070309020205020404" pitchFamily="49" charset="0"/>
+                        </a:rPr>
+                        <a:t>help(</a:t>
+                      </a:r>
+                      <a:r>
+                        <a:rPr lang="en-US" sz="2200" b="0" i="0" dirty="0" err="1">
+                          <a:effectLst/>
+                          <a:latin typeface="Courier New" panose="02070309020205020404" pitchFamily="49" charset="0"/>
+                          <a:cs typeface="Courier New" panose="02070309020205020404" pitchFamily="49" charset="0"/>
+                        </a:rPr>
+                        <a:t>seq.count</a:t>
+                      </a:r>
+                      <a:r>
+                        <a:rPr lang="en-US" sz="2200" b="0" i="0" dirty="0">
+                          <a:effectLst/>
+                          <a:latin typeface="Courier New" panose="02070309020205020404" pitchFamily="49" charset="0"/>
+                          <a:cs typeface="Courier New" panose="02070309020205020404" pitchFamily="49" charset="0"/>
+                        </a:rPr>
+                        <a:t>)</a:t>
+                      </a:r>
+                    </a:p>
+                  </a:txBody>
+                  <a:tcPr marL="114300" marR="114300" marT="76200" marB="76200" anchor="ctr"/>
+                </a:tc>
+                <a:extLst>
+                  <a:ext uri="{0D108BD9-81ED-4DB2-BD59-A6C34878D82A}">
+                    <a16:rowId xmlns:a16="http://schemas.microsoft.com/office/drawing/2014/main" val="567651721"/>
+                  </a:ext>
+                </a:extLst>
+              </a:tr>
+            </a:tbl>
+          </a:graphicData>
+        </a:graphic>
+      </p:graphicFrame>
+      <p:pic>
+        <p:nvPicPr>
+          <p:cNvPr id="10" name="Picture 9">
+            <a:extLst>
+              <a:ext uri="{FF2B5EF4-FFF2-40B4-BE49-F238E27FC236}">
+                <a16:creationId xmlns:a16="http://schemas.microsoft.com/office/drawing/2014/main" id="{A0A7BE7D-1CED-F4D1-F088-B5EFC5A33BD1}"/>
+              </a:ext>
+            </a:extLst>
+          </p:cNvPr>
+          <p:cNvPicPr>
+            <a:picLocks noChangeAspect="1"/>
+          </p:cNvPicPr>
+          <p:nvPr/>
+        </p:nvPicPr>
+        <p:blipFill>
+          <a:blip r:embed="rId2"/>
+          <a:srcRect b="16203"/>
+          <a:stretch>
+            <a:fillRect/>
+          </a:stretch>
+        </p:blipFill>
+        <p:spPr>
+          <a:xfrm>
+            <a:off x="4176294" y="4098020"/>
+            <a:ext cx="3518568" cy="2704959"/>
           </a:xfrm>
           <a:prstGeom prst="rect">
             <a:avLst/>
           </a:prstGeom>
         </p:spPr>
+      </p:pic>
+      <p:pic>
+        <p:nvPicPr>
+          <p:cNvPr id="13" name="Picture 12">
+            <a:extLst>
+              <a:ext uri="{FF2B5EF4-FFF2-40B4-BE49-F238E27FC236}">
+                <a16:creationId xmlns:a16="http://schemas.microsoft.com/office/drawing/2014/main" id="{3E547DC5-0399-350D-D79D-79DA92AA7E7C}"/>
+              </a:ext>
+            </a:extLst>
+          </p:cNvPr>
+          <p:cNvPicPr>
+            <a:picLocks noChangeAspect="1"/>
+          </p:cNvPicPr>
+          <p:nvPr/>
+        </p:nvPicPr>
+        <p:blipFill>
+          <a:blip r:embed="rId3"/>
+          <a:stretch>
+            <a:fillRect/>
+          </a:stretch>
+        </p:blipFill>
+        <p:spPr>
+          <a:xfrm>
+            <a:off x="7867406" y="4237783"/>
+            <a:ext cx="4066030" cy="1406351"/>
+          </a:xfrm>
+          <a:prstGeom prst="rect">
+            <a:avLst/>
+          </a:prstGeom>
+        </p:spPr>
+      </p:pic>
+      <p:sp>
+        <p:nvSpPr>
+          <p:cNvPr id="14" name="TextBox 13">
+            <a:extLst>
+              <a:ext uri="{FF2B5EF4-FFF2-40B4-BE49-F238E27FC236}">
+                <a16:creationId xmlns:a16="http://schemas.microsoft.com/office/drawing/2014/main" id="{3E7E7A95-521D-284A-D3BE-9008AF2862D2}"/>
+              </a:ext>
+            </a:extLst>
+          </p:cNvPr>
+          <p:cNvSpPr txBox="1"/>
+          <p:nvPr/>
+        </p:nvSpPr>
+        <p:spPr>
+          <a:xfrm>
+            <a:off x="545431" y="4098020"/>
+            <a:ext cx="3217762" cy="2308324"/>
+          </a:xfrm>
+          <a:prstGeom prst="rect">
+            <a:avLst/>
+          </a:prstGeom>
+          <a:noFill/>
+        </p:spPr>
+        <p:txBody>
+          <a:bodyPr wrap="square" rtlCol="0">
+            <a:spAutoFit/>
+          </a:bodyPr>
+          <a:lstStyle/>
+          <a:p>
+            <a:r>
+              <a:rPr lang="en-US" sz="2400" dirty="0">
+                <a:latin typeface="Helvetica Light" panose="020B0403020202020204" pitchFamily="34" charset="0"/>
+              </a:rPr>
+              <a:t>To change type of an object, you can apply:</a:t>
+            </a:r>
+          </a:p>
+          <a:p>
+            <a:endParaRPr lang="en-US" sz="2400" dirty="0">
+              <a:latin typeface="Helvetica Light" panose="020B0403020202020204" pitchFamily="34" charset="0"/>
+            </a:endParaRPr>
+          </a:p>
+          <a:p>
+            <a:r>
+              <a:rPr lang="en-US" sz="2400" dirty="0">
+                <a:latin typeface="Courier New" panose="02070309020205020404" pitchFamily="49" charset="0"/>
+                <a:cs typeface="Courier New" panose="02070309020205020404" pitchFamily="49" charset="0"/>
+              </a:rPr>
+              <a:t>float(var)</a:t>
+            </a:r>
+          </a:p>
+          <a:p>
+            <a:r>
+              <a:rPr lang="en-US" sz="2400" dirty="0">
+                <a:latin typeface="Courier New" panose="02070309020205020404" pitchFamily="49" charset="0"/>
+                <a:cs typeface="Courier New" panose="02070309020205020404" pitchFamily="49" charset="0"/>
+              </a:rPr>
+              <a:t>string(var)</a:t>
+            </a:r>
+          </a:p>
+          <a:p>
+            <a:r>
+              <a:rPr lang="en-US" sz="2400" dirty="0">
+                <a:latin typeface="Courier New" panose="02070309020205020404" pitchFamily="49" charset="0"/>
+                <a:cs typeface="Courier New" panose="02070309020205020404" pitchFamily="49" charset="0"/>
+              </a:rPr>
+              <a:t>int(var)</a:t>
+            </a:r>
+          </a:p>
+        </p:txBody>
+      </p:sp>
+    </p:spTree>
+    <p:extLst>
+      <p:ext uri="{BB962C8B-B14F-4D97-AF65-F5344CB8AC3E}">
+        <p14:creationId xmlns:p14="http://schemas.microsoft.com/office/powerpoint/2010/main" val="1300954205"/>
+      </p:ext>
+    </p:extLst>
+  </p:cSld>
+  <p:clrMapOvr>
+    <a:masterClrMapping/>
+  </p:clrMapOvr>
+</p:sld>
+</file>
+
+<file path=ppt/slides/slide12.xml><?xml version="1.0" encoding="utf-8"?>
+<p:sld xmlns:a="http://schemas.openxmlformats.org/drawingml/2006/main" xmlns:r="http://schemas.openxmlformats.org/officeDocument/2006/relationships" xmlns:p="http://schemas.openxmlformats.org/presentationml/2006/main">
+  <p:cSld>
+    <p:spTree>
+      <p:nvGrpSpPr>
+        <p:cNvPr id="1" name="">
+          <a:extLst>
+            <a:ext uri="{FF2B5EF4-FFF2-40B4-BE49-F238E27FC236}">
+              <a16:creationId xmlns:a16="http://schemas.microsoft.com/office/drawing/2014/main" id="{7382D95E-5FD7-29EB-067C-917529C1E4B8}"/>
+            </a:ext>
+          </a:extLst>
+        </p:cNvPr>
+        <p:cNvGrpSpPr/>
+        <p:nvPr/>
+      </p:nvGrpSpPr>
+      <p:grpSpPr>
+        <a:xfrm>
+          <a:off x="0" y="0"/>
+          <a:ext cx="0" cy="0"/>
+          <a:chOff x="0" y="0"/>
+          <a:chExt cx="0" cy="0"/>
+        </a:xfrm>
+      </p:grpSpPr>
+      <p:sp>
+        <p:nvSpPr>
+          <p:cNvPr id="2" name="TextBox 1">
+            <a:extLst>
+              <a:ext uri="{FF2B5EF4-FFF2-40B4-BE49-F238E27FC236}">
+                <a16:creationId xmlns:a16="http://schemas.microsoft.com/office/drawing/2014/main" id="{FE392883-1339-07F7-DC2D-86C3E7D64BB1}"/>
+              </a:ext>
+            </a:extLst>
+          </p:cNvPr>
+          <p:cNvSpPr txBox="1"/>
+          <p:nvPr/>
+        </p:nvSpPr>
+        <p:spPr>
+          <a:xfrm>
+            <a:off x="2643370" y="237965"/>
+            <a:ext cx="7027886" cy="584775"/>
+          </a:xfrm>
+          <a:prstGeom prst="rect">
+            <a:avLst/>
+          </a:prstGeom>
+          <a:noFill/>
+        </p:spPr>
+        <p:txBody>
+          <a:bodyPr wrap="none" rtlCol="0">
+            <a:spAutoFit/>
+          </a:bodyPr>
+          <a:lstStyle/>
+          <a:p>
+            <a:r>
+              <a:rPr lang="en-US" sz="3200" b="1" dirty="0">
+                <a:latin typeface="Helvetica Light" panose="020B0403020202020204" pitchFamily="34" charset="0"/>
+              </a:rPr>
+              <a:t>Jupyter: tab autocomplete helps a ton</a:t>
+            </a:r>
+            <a:endParaRPr lang="en-US" sz="2800" b="1" dirty="0">
+              <a:latin typeface="Helvetica Light" panose="020B0403020202020204" pitchFamily="34" charset="0"/>
+            </a:endParaRPr>
+          </a:p>
+        </p:txBody>
+      </p:sp>
+      <p:pic>
+        <p:nvPicPr>
+          <p:cNvPr id="5" name="Picture 4">
+            <a:extLst>
+              <a:ext uri="{FF2B5EF4-FFF2-40B4-BE49-F238E27FC236}">
+                <a16:creationId xmlns:a16="http://schemas.microsoft.com/office/drawing/2014/main" id="{9FE78523-5F24-9B39-642F-D5000EFE9CFA}"/>
+              </a:ext>
+            </a:extLst>
+          </p:cNvPr>
+          <p:cNvPicPr>
+            <a:picLocks noChangeAspect="1"/>
+          </p:cNvPicPr>
+          <p:nvPr/>
+        </p:nvPicPr>
+        <p:blipFill>
+          <a:blip r:embed="rId2"/>
+          <a:stretch>
+            <a:fillRect/>
+          </a:stretch>
+        </p:blipFill>
+        <p:spPr>
+          <a:xfrm>
+            <a:off x="376671" y="2251235"/>
+            <a:ext cx="5391645" cy="3282282"/>
+          </a:xfrm>
+          <a:prstGeom prst="rect">
+            <a:avLst/>
+          </a:prstGeom>
+        </p:spPr>
+      </p:pic>
+      <p:pic>
+        <p:nvPicPr>
+          <p:cNvPr id="7" name="Picture 6">
+            <a:extLst>
+              <a:ext uri="{FF2B5EF4-FFF2-40B4-BE49-F238E27FC236}">
+                <a16:creationId xmlns:a16="http://schemas.microsoft.com/office/drawing/2014/main" id="{77652D9E-5869-1FAE-B785-82D640E848BE}"/>
+              </a:ext>
+            </a:extLst>
+          </p:cNvPr>
+          <p:cNvPicPr>
+            <a:picLocks noChangeAspect="1"/>
+          </p:cNvPicPr>
+          <p:nvPr/>
+        </p:nvPicPr>
+        <p:blipFill>
+          <a:blip r:embed="rId3"/>
+          <a:stretch>
+            <a:fillRect/>
+          </a:stretch>
+        </p:blipFill>
+        <p:spPr>
+          <a:xfrm>
+            <a:off x="6552532" y="2251235"/>
+            <a:ext cx="5054600" cy="4368800"/>
+          </a:xfrm>
+          <a:prstGeom prst="rect">
+            <a:avLst/>
+          </a:prstGeom>
+        </p:spPr>
+      </p:pic>
+      <p:sp>
+        <p:nvSpPr>
+          <p:cNvPr id="8" name="TextBox 7">
+            <a:extLst>
+              <a:ext uri="{FF2B5EF4-FFF2-40B4-BE49-F238E27FC236}">
+                <a16:creationId xmlns:a16="http://schemas.microsoft.com/office/drawing/2014/main" id="{1BE508F8-8A53-4755-9351-64C818B3F05B}"/>
+              </a:ext>
+            </a:extLst>
+          </p:cNvPr>
+          <p:cNvSpPr txBox="1"/>
+          <p:nvPr/>
+        </p:nvSpPr>
+        <p:spPr>
+          <a:xfrm>
+            <a:off x="376671" y="1549072"/>
+            <a:ext cx="3522118" cy="523220"/>
+          </a:xfrm>
+          <a:prstGeom prst="rect">
+            <a:avLst/>
+          </a:prstGeom>
+          <a:noFill/>
+        </p:spPr>
+        <p:txBody>
+          <a:bodyPr wrap="none" rtlCol="0">
+            <a:spAutoFit/>
+          </a:bodyPr>
+          <a:lstStyle/>
+          <a:p>
+            <a:r>
+              <a:rPr lang="en-US" sz="2800" dirty="0">
+                <a:latin typeface="Helvetica Light" panose="020B0403020202020204" pitchFamily="34" charset="0"/>
+              </a:rPr>
+              <a:t>List stored variables:</a:t>
+            </a:r>
+          </a:p>
+        </p:txBody>
+      </p:sp>
+      <p:sp>
+        <p:nvSpPr>
+          <p:cNvPr id="9" name="TextBox 8">
+            <a:extLst>
+              <a:ext uri="{FF2B5EF4-FFF2-40B4-BE49-F238E27FC236}">
+                <a16:creationId xmlns:a16="http://schemas.microsoft.com/office/drawing/2014/main" id="{2EC895A6-3569-2929-D0FC-CED9F64D6DCF}"/>
+              </a:ext>
+            </a:extLst>
+          </p:cNvPr>
+          <p:cNvSpPr txBox="1"/>
+          <p:nvPr/>
+        </p:nvSpPr>
+        <p:spPr>
+          <a:xfrm>
+            <a:off x="6400481" y="1549072"/>
+            <a:ext cx="5019323" cy="523220"/>
+          </a:xfrm>
+          <a:prstGeom prst="rect">
+            <a:avLst/>
+          </a:prstGeom>
+          <a:noFill/>
+        </p:spPr>
+        <p:txBody>
+          <a:bodyPr wrap="none" rtlCol="0">
+            <a:spAutoFit/>
+          </a:bodyPr>
+          <a:lstStyle/>
+          <a:p>
+            <a:r>
+              <a:rPr lang="en-US" sz="2800" dirty="0">
+                <a:latin typeface="Helvetica Light" panose="020B0403020202020204" pitchFamily="34" charset="0"/>
+              </a:rPr>
+              <a:t>List methods by variable type:</a:t>
+            </a:r>
+          </a:p>
+        </p:txBody>
+      </p:sp>
+    </p:spTree>
+    <p:extLst>
+      <p:ext uri="{BB962C8B-B14F-4D97-AF65-F5344CB8AC3E}">
+        <p14:creationId xmlns:p14="http://schemas.microsoft.com/office/powerpoint/2010/main" val="470968535"/>
+      </p:ext>
+    </p:extLst>
+  </p:cSld>
+  <p:clrMapOvr>
+    <a:masterClrMapping/>
+  </p:clrMapOvr>
+</p:sld>
+</file>
+
+<file path=ppt/slides/slide13.xml><?xml version="1.0" encoding="utf-8"?>
+<p:sld xmlns:a="http://schemas.openxmlformats.org/drawingml/2006/main" xmlns:r="http://schemas.openxmlformats.org/officeDocument/2006/relationships" xmlns:p="http://schemas.openxmlformats.org/presentationml/2006/main">
+  <p:cSld>
+    <p:spTree>
+      <p:nvGrpSpPr>
+        <p:cNvPr id="1" name=""/>
+        <p:cNvGrpSpPr/>
+        <p:nvPr/>
+      </p:nvGrpSpPr>
+      <p:grpSpPr>
+        <a:xfrm>
+          <a:off x="0" y="0"/>
+          <a:ext cx="0" cy="0"/>
+          <a:chOff x="0" y="0"/>
+          <a:chExt cx="0" cy="0"/>
+        </a:xfrm>
+      </p:grpSpPr>
+      <p:sp>
+        <p:nvSpPr>
+          <p:cNvPr id="2" name="TextBox 1">
+            <a:extLst>
+              <a:ext uri="{FF2B5EF4-FFF2-40B4-BE49-F238E27FC236}">
+                <a16:creationId xmlns:a16="http://schemas.microsoft.com/office/drawing/2014/main" id="{6CC28B14-71D3-284A-B530-F620DCCC2513}"/>
+              </a:ext>
+            </a:extLst>
+          </p:cNvPr>
+          <p:cNvSpPr txBox="1"/>
+          <p:nvPr/>
+        </p:nvSpPr>
+        <p:spPr>
+          <a:xfrm>
+            <a:off x="1762813" y="191687"/>
+            <a:ext cx="5808000" cy="584775"/>
+          </a:xfrm>
+          <a:prstGeom prst="rect">
+            <a:avLst/>
+          </a:prstGeom>
+          <a:noFill/>
+        </p:spPr>
+        <p:txBody>
+          <a:bodyPr wrap="none" rtlCol="0">
+            <a:spAutoFit/>
+          </a:bodyPr>
+          <a:lstStyle/>
+          <a:p>
+            <a:r>
+              <a:rPr lang="en-US" sz="3200" dirty="0">
+                <a:latin typeface="Helvetica Light" panose="020B0403020202020204" pitchFamily="34" charset="0"/>
+              </a:rPr>
+              <a:t>Interactive python: </a:t>
+            </a:r>
+            <a:r>
+              <a:rPr lang="en-US" sz="3200" dirty="0" err="1">
+                <a:latin typeface="Helvetica Light" panose="020B0403020202020204" pitchFamily="34" charset="0"/>
+              </a:rPr>
+              <a:t>Ipy</a:t>
+            </a:r>
+            <a:r>
+              <a:rPr lang="en-US" sz="3200" dirty="0">
+                <a:latin typeface="Helvetica Light" panose="020B0403020202020204" pitchFamily="34" charset="0"/>
+              </a:rPr>
+              <a:t> console</a:t>
+            </a:r>
+          </a:p>
+        </p:txBody>
+      </p:sp>
+      <p:sp>
+        <p:nvSpPr>
+          <p:cNvPr id="5" name="TextBox 4">
+            <a:extLst>
+              <a:ext uri="{FF2B5EF4-FFF2-40B4-BE49-F238E27FC236}">
+                <a16:creationId xmlns:a16="http://schemas.microsoft.com/office/drawing/2014/main" id="{2BA3819C-7CA5-BF45-9CD1-3A9F60B3CBBF}"/>
+              </a:ext>
+            </a:extLst>
+          </p:cNvPr>
+          <p:cNvSpPr txBox="1"/>
+          <p:nvPr/>
+        </p:nvSpPr>
+        <p:spPr>
+          <a:xfrm>
+            <a:off x="9422296" y="1576781"/>
+            <a:ext cx="2769704" cy="923330"/>
+          </a:xfrm>
+          <a:prstGeom prst="rect">
+            <a:avLst/>
+          </a:prstGeom>
+          <a:noFill/>
+        </p:spPr>
+        <p:txBody>
+          <a:bodyPr wrap="square" rtlCol="0">
+            <a:spAutoFit/>
+          </a:bodyPr>
+          <a:lstStyle/>
+          <a:p>
+            <a:r>
+              <a:rPr lang="en-US" dirty="0">
+                <a:latin typeface="Helvetica Light" panose="020B0403020202020204" pitchFamily="34" charset="0"/>
+              </a:rPr>
+              <a:t>Launch </a:t>
+            </a:r>
+            <a:r>
+              <a:rPr lang="en-US" b="1" dirty="0" err="1">
+                <a:latin typeface="Helvetica Light" panose="020B0403020202020204" pitchFamily="34" charset="0"/>
+              </a:rPr>
+              <a:t>Jupyter</a:t>
+            </a:r>
+            <a:r>
+              <a:rPr lang="en-US" b="1" dirty="0">
+                <a:latin typeface="Helvetica Light" panose="020B0403020202020204" pitchFamily="34" charset="0"/>
+              </a:rPr>
+              <a:t> </a:t>
+            </a:r>
+            <a:r>
+              <a:rPr lang="en-US" b="1" dirty="0" err="1">
+                <a:latin typeface="Helvetica Light" panose="020B0403020202020204" pitchFamily="34" charset="0"/>
+              </a:rPr>
+              <a:t>Qtconsole</a:t>
+            </a:r>
+            <a:r>
+              <a:rPr lang="en-US" b="1" dirty="0">
+                <a:latin typeface="Helvetica Light" panose="020B0403020202020204" pitchFamily="34" charset="0"/>
+              </a:rPr>
+              <a:t> </a:t>
+            </a:r>
+            <a:r>
+              <a:rPr lang="en-US" dirty="0">
+                <a:latin typeface="Helvetica Light" panose="020B0403020202020204" pitchFamily="34" charset="0"/>
+              </a:rPr>
+              <a:t>from Anaconda navigator</a:t>
+            </a:r>
+            <a:endParaRPr lang="en-US" dirty="0"/>
+          </a:p>
+        </p:txBody>
+      </p:sp>
+      <p:pic>
+        <p:nvPicPr>
+          <p:cNvPr id="8" name="Picture 7" descr="Text&#10;&#10;Description automatically generated with low confidence">
+            <a:extLst>
+              <a:ext uri="{FF2B5EF4-FFF2-40B4-BE49-F238E27FC236}">
+                <a16:creationId xmlns:a16="http://schemas.microsoft.com/office/drawing/2014/main" id="{74D1C905-9C60-E144-8711-9CB9C8FFF47B}"/>
+              </a:ext>
+            </a:extLst>
+          </p:cNvPr>
+          <p:cNvPicPr>
+            <a:picLocks noChangeAspect="1"/>
+          </p:cNvPicPr>
+          <p:nvPr/>
+        </p:nvPicPr>
+        <p:blipFill rotWithShape="1">
+          <a:blip r:embed="rId2"/>
+          <a:srcRect r="30974"/>
+          <a:stretch/>
+        </p:blipFill>
+        <p:spPr>
+          <a:xfrm>
+            <a:off x="775648" y="1051034"/>
+            <a:ext cx="4426974" cy="5436223"/>
+          </a:xfrm>
+          <a:prstGeom prst="rect">
+            <a:avLst/>
+          </a:prstGeom>
+        </p:spPr>
+      </p:pic>
+      <p:sp>
+        <p:nvSpPr>
+          <p:cNvPr id="9" name="TextBox 8">
+            <a:extLst>
+              <a:ext uri="{FF2B5EF4-FFF2-40B4-BE49-F238E27FC236}">
+                <a16:creationId xmlns:a16="http://schemas.microsoft.com/office/drawing/2014/main" id="{0AEB4600-4550-CB41-A5C9-110785544103}"/>
+              </a:ext>
+            </a:extLst>
+          </p:cNvPr>
+          <p:cNvSpPr txBox="1"/>
+          <p:nvPr/>
+        </p:nvSpPr>
+        <p:spPr>
+          <a:xfrm>
+            <a:off x="5399633" y="3229556"/>
+            <a:ext cx="3179493" cy="2492990"/>
+          </a:xfrm>
+          <a:prstGeom prst="rect">
+            <a:avLst/>
+          </a:prstGeom>
+          <a:noFill/>
+        </p:spPr>
+        <p:txBody>
+          <a:bodyPr wrap="square" rtlCol="0">
+            <a:spAutoFit/>
+          </a:bodyPr>
+          <a:lstStyle/>
+          <a:p>
+            <a:r>
+              <a:rPr lang="en-US" sz="2600" dirty="0">
+                <a:latin typeface="Helvetica Light" panose="020B0403020202020204" pitchFamily="34" charset="0"/>
+              </a:rPr>
+              <a:t>Functions dually as a terminal window and python interactive prompt, tab complete functionality</a:t>
+            </a:r>
+            <a:endParaRPr lang="en-US" sz="2600" dirty="0">
+              <a:latin typeface="Courier New" panose="02070309020205020404" pitchFamily="49" charset="0"/>
+              <a:cs typeface="Courier New" panose="02070309020205020404" pitchFamily="49" charset="0"/>
+            </a:endParaRPr>
+          </a:p>
+        </p:txBody>
+      </p:sp>
+    </p:spTree>
+    <p:extLst>
+      <p:ext uri="{BB962C8B-B14F-4D97-AF65-F5344CB8AC3E}">
+        <p14:creationId xmlns:p14="http://schemas.microsoft.com/office/powerpoint/2010/main" val="4188606726"/>
+      </p:ext>
+    </p:extLst>
+  </p:cSld>
+  <p:clrMapOvr>
+    <a:masterClrMapping/>
+  </p:clrMapOvr>
+</p:sld>
+</file>
+
+<file path=ppt/slides/slide14.xml><?xml version="1.0" encoding="utf-8"?>
+<p:sld xmlns:a="http://schemas.openxmlformats.org/drawingml/2006/main" xmlns:r="http://schemas.openxmlformats.org/officeDocument/2006/relationships" xmlns:p="http://schemas.openxmlformats.org/presentationml/2006/main">
+  <p:cSld>
+    <p:spTree>
+      <p:nvGrpSpPr>
+        <p:cNvPr id="1" name=""/>
+        <p:cNvGrpSpPr/>
+        <p:nvPr/>
+      </p:nvGrpSpPr>
+      <p:grpSpPr>
+        <a:xfrm>
+          <a:off x="0" y="0"/>
+          <a:ext cx="0" cy="0"/>
+          <a:chOff x="0" y="0"/>
+          <a:chExt cx="0" cy="0"/>
+        </a:xfrm>
+      </p:grpSpPr>
+      <p:sp>
+        <p:nvSpPr>
+          <p:cNvPr id="2" name="Rectangle 1">
+            <a:extLst>
+              <a:ext uri="{FF2B5EF4-FFF2-40B4-BE49-F238E27FC236}">
+                <a16:creationId xmlns:a16="http://schemas.microsoft.com/office/drawing/2014/main" id="{61C2B915-E064-284F-A5DB-4F28686FADAB}"/>
+              </a:ext>
+            </a:extLst>
+          </p:cNvPr>
+          <p:cNvSpPr/>
+          <p:nvPr/>
+        </p:nvSpPr>
+        <p:spPr>
+          <a:xfrm>
+            <a:off x="1397876" y="1836321"/>
+            <a:ext cx="7924800" cy="1292662"/>
+          </a:xfrm>
+          <a:prstGeom prst="rect">
+            <a:avLst/>
+          </a:prstGeom>
+          <a:ln>
+            <a:solidFill>
+              <a:schemeClr val="accent1"/>
+            </a:solidFill>
+          </a:ln>
+        </p:spPr>
         <p:txBody>
           <a:bodyPr wrap="square">
             <a:spAutoFit/>
@@ -4456,10 +5556,295 @@
           <a:lstStyle/>
           <a:p>
             <a:r>
+              <a:rPr lang="en-US" sz="2600" dirty="0">
+                <a:latin typeface="Courier" pitchFamily="2" charset="0"/>
+              </a:rPr>
+              <a:t>name3 = input("Enter a string: ")</a:t>
+            </a:r>
+          </a:p>
+          <a:p>
+            <a:endParaRPr lang="en-US" sz="2600" dirty="0">
+              <a:latin typeface="Courier" pitchFamily="2" charset="0"/>
+            </a:endParaRPr>
+          </a:p>
+          <a:p>
+            <a:r>
+              <a:rPr lang="en-US" sz="2600" dirty="0">
+                <a:latin typeface="Courier" pitchFamily="2" charset="0"/>
+              </a:rPr>
+              <a:t>print(name3)</a:t>
+            </a:r>
+          </a:p>
+        </p:txBody>
+      </p:sp>
+      <p:sp>
+        <p:nvSpPr>
+          <p:cNvPr id="3" name="Rectangle 2">
+            <a:extLst>
+              <a:ext uri="{FF2B5EF4-FFF2-40B4-BE49-F238E27FC236}">
+                <a16:creationId xmlns:a16="http://schemas.microsoft.com/office/drawing/2014/main" id="{D446C60C-2780-A249-BFE2-FA1D120D6DB6}"/>
+              </a:ext>
+            </a:extLst>
+          </p:cNvPr>
+          <p:cNvSpPr/>
+          <p:nvPr/>
+        </p:nvSpPr>
+        <p:spPr>
+          <a:xfrm>
+            <a:off x="1397876" y="4140640"/>
+            <a:ext cx="7924800" cy="2092881"/>
+          </a:xfrm>
+          <a:prstGeom prst="rect">
+            <a:avLst/>
+          </a:prstGeom>
+          <a:ln>
+            <a:solidFill>
+              <a:schemeClr val="accent1"/>
+            </a:solidFill>
+          </a:ln>
+        </p:spPr>
+        <p:txBody>
+          <a:bodyPr wrap="square">
+            <a:spAutoFit/>
+          </a:bodyPr>
+          <a:lstStyle/>
+          <a:p>
+            <a:r>
+              <a:rPr lang="en-US" sz="2600" dirty="0">
+                <a:solidFill>
+                  <a:srgbClr val="002060"/>
+                </a:solidFill>
+                <a:latin typeface="Courier" pitchFamily="2" charset="0"/>
+              </a:rPr>
+              <a:t>‘Enter a string: ‘ prompt will appear at command line. Type a string</a:t>
+            </a:r>
+          </a:p>
+          <a:p>
+            <a:endParaRPr lang="en-US" sz="2600" dirty="0">
+              <a:solidFill>
+                <a:srgbClr val="002060"/>
+              </a:solidFill>
+              <a:latin typeface="Courier" pitchFamily="2" charset="0"/>
+            </a:endParaRPr>
+          </a:p>
+          <a:p>
+            <a:r>
+              <a:rPr lang="en-US" sz="2600" dirty="0">
+                <a:solidFill>
+                  <a:srgbClr val="002060"/>
+                </a:solidFill>
+                <a:latin typeface="Courier" pitchFamily="2" charset="0"/>
+              </a:rPr>
+              <a:t>If ‘Burrow’ is typed and Enter hit,</a:t>
+            </a:r>
+          </a:p>
+          <a:p>
+            <a:r>
+              <a:rPr lang="en-US" sz="2600" dirty="0">
+                <a:solidFill>
+                  <a:srgbClr val="002060"/>
+                </a:solidFill>
+                <a:latin typeface="Courier" pitchFamily="2" charset="0"/>
+              </a:rPr>
+              <a:t>‘Burrow’ should print to screen</a:t>
+            </a:r>
+          </a:p>
+        </p:txBody>
+      </p:sp>
+      <p:sp>
+        <p:nvSpPr>
+          <p:cNvPr id="6" name="Rectangle 5">
+            <a:extLst>
+              <a:ext uri="{FF2B5EF4-FFF2-40B4-BE49-F238E27FC236}">
+                <a16:creationId xmlns:a16="http://schemas.microsoft.com/office/drawing/2014/main" id="{D59BBFBD-9BEB-1243-BC42-5A02EA92B35E}"/>
+              </a:ext>
+            </a:extLst>
+          </p:cNvPr>
+          <p:cNvSpPr/>
+          <p:nvPr/>
+        </p:nvSpPr>
+        <p:spPr>
+          <a:xfrm>
+            <a:off x="1332303" y="364500"/>
+            <a:ext cx="9910085" cy="584775"/>
+          </a:xfrm>
+          <a:prstGeom prst="rect">
+            <a:avLst/>
+          </a:prstGeom>
+        </p:spPr>
+        <p:txBody>
+          <a:bodyPr wrap="none">
+            <a:spAutoFit/>
+          </a:bodyPr>
+          <a:lstStyle/>
+          <a:p>
+            <a:r>
+              <a:rPr lang="en-US" sz="3200" b="1" dirty="0">
+                <a:solidFill>
+                  <a:srgbClr val="333333"/>
+                </a:solidFill>
+                <a:latin typeface="HELVETICA LIGHT" panose="020B0403020202020204" pitchFamily="34" charset="0"/>
+              </a:rPr>
+              <a:t>Pulling raw input from the command line </a:t>
+            </a:r>
+            <a:r>
+              <a:rPr lang="en-US" sz="3200" b="1" dirty="0">
+                <a:solidFill>
+                  <a:srgbClr val="333333"/>
+                </a:solidFill>
+                <a:latin typeface="Courier" pitchFamily="2" charset="0"/>
+              </a:rPr>
+              <a:t>(input())</a:t>
+            </a:r>
+            <a:endParaRPr lang="en-US" sz="3200" b="1" dirty="0">
+              <a:solidFill>
+                <a:srgbClr val="333333"/>
+              </a:solidFill>
+              <a:effectLst/>
+              <a:latin typeface="Courier" pitchFamily="2" charset="0"/>
+            </a:endParaRPr>
+          </a:p>
+        </p:txBody>
+      </p:sp>
+      <p:sp>
+        <p:nvSpPr>
+          <p:cNvPr id="7" name="TextBox 6">
+            <a:extLst>
+              <a:ext uri="{FF2B5EF4-FFF2-40B4-BE49-F238E27FC236}">
+                <a16:creationId xmlns:a16="http://schemas.microsoft.com/office/drawing/2014/main" id="{A83C82C0-485D-454E-AE1B-2D525EBB7573}"/>
+              </a:ext>
+            </a:extLst>
+          </p:cNvPr>
+          <p:cNvSpPr txBox="1"/>
+          <p:nvPr/>
+        </p:nvSpPr>
+        <p:spPr>
+          <a:xfrm>
+            <a:off x="1332303" y="1302050"/>
+            <a:ext cx="1670650" cy="492443"/>
+          </a:xfrm>
+          <a:prstGeom prst="rect">
+            <a:avLst/>
+          </a:prstGeom>
+          <a:noFill/>
+        </p:spPr>
+        <p:txBody>
+          <a:bodyPr wrap="none" rtlCol="0">
+            <a:spAutoFit/>
+          </a:bodyPr>
+          <a:lstStyle/>
+          <a:p>
+            <a:r>
+              <a:rPr lang="en-US" sz="2600" dirty="0">
+                <a:latin typeface="Helvetica Light" panose="020B0403020202020204" pitchFamily="34" charset="0"/>
+              </a:rPr>
+              <a:t>In Python:</a:t>
+            </a:r>
+          </a:p>
+        </p:txBody>
+      </p:sp>
+      <p:sp>
+        <p:nvSpPr>
+          <p:cNvPr id="8" name="TextBox 7">
+            <a:extLst>
+              <a:ext uri="{FF2B5EF4-FFF2-40B4-BE49-F238E27FC236}">
+                <a16:creationId xmlns:a16="http://schemas.microsoft.com/office/drawing/2014/main" id="{9C8DC85D-EDA8-5C43-BF1B-DCEEE2CD8A89}"/>
+              </a:ext>
+            </a:extLst>
+          </p:cNvPr>
+          <p:cNvSpPr txBox="1"/>
+          <p:nvPr/>
+        </p:nvSpPr>
+        <p:spPr>
+          <a:xfrm>
+            <a:off x="1332303" y="3648197"/>
+            <a:ext cx="3967753" cy="492443"/>
+          </a:xfrm>
+          <a:prstGeom prst="rect">
+            <a:avLst/>
+          </a:prstGeom>
+          <a:noFill/>
+        </p:spPr>
+        <p:txBody>
+          <a:bodyPr wrap="none" rtlCol="0">
+            <a:spAutoFit/>
+          </a:bodyPr>
+          <a:lstStyle/>
+          <a:p>
+            <a:r>
+              <a:rPr lang="en-US" sz="2600" dirty="0">
+                <a:solidFill>
+                  <a:srgbClr val="002060"/>
+                </a:solidFill>
+                <a:latin typeface="Helvetica Light" panose="020B0403020202020204" pitchFamily="34" charset="0"/>
+              </a:rPr>
+              <a:t>At command line prompt:</a:t>
+            </a:r>
+          </a:p>
+        </p:txBody>
+      </p:sp>
+    </p:spTree>
+    <p:extLst>
+      <p:ext uri="{BB962C8B-B14F-4D97-AF65-F5344CB8AC3E}">
+        <p14:creationId xmlns:p14="http://schemas.microsoft.com/office/powerpoint/2010/main" val="20693727"/>
+      </p:ext>
+    </p:extLst>
+  </p:cSld>
+  <p:clrMapOvr>
+    <a:masterClrMapping/>
+  </p:clrMapOvr>
+</p:sld>
+</file>
+
+<file path=ppt/slides/slide15.xml><?xml version="1.0" encoding="utf-8"?>
+<p:sld xmlns:a="http://schemas.openxmlformats.org/drawingml/2006/main" xmlns:r="http://schemas.openxmlformats.org/officeDocument/2006/relationships" xmlns:p="http://schemas.openxmlformats.org/presentationml/2006/main">
+  <p:cSld>
+    <p:spTree>
+      <p:nvGrpSpPr>
+        <p:cNvPr id="1" name=""/>
+        <p:cNvGrpSpPr/>
+        <p:nvPr/>
+      </p:nvGrpSpPr>
+      <p:grpSpPr>
+        <a:xfrm>
+          <a:off x="0" y="0"/>
+          <a:ext cx="0" cy="0"/>
+          <a:chOff x="0" y="0"/>
+          <a:chExt cx="0" cy="0"/>
+        </a:xfrm>
+      </p:grpSpPr>
+      <p:sp>
+        <p:nvSpPr>
+          <p:cNvPr id="2" name="Rectangle 1">
+            <a:extLst>
+              <a:ext uri="{FF2B5EF4-FFF2-40B4-BE49-F238E27FC236}">
+                <a16:creationId xmlns:a16="http://schemas.microsoft.com/office/drawing/2014/main" id="{C0DC5892-0CFC-524E-BB4E-0851726A9AE2}"/>
+              </a:ext>
+            </a:extLst>
+          </p:cNvPr>
+          <p:cNvSpPr/>
+          <p:nvPr/>
+        </p:nvSpPr>
+        <p:spPr>
+          <a:xfrm>
+            <a:off x="457200" y="399030"/>
+            <a:ext cx="10849232" cy="3477875"/>
+          </a:xfrm>
+          <a:prstGeom prst="rect">
+            <a:avLst/>
+          </a:prstGeom>
+        </p:spPr>
+        <p:txBody>
+          <a:bodyPr wrap="square">
+            <a:spAutoFit/>
+          </a:bodyPr>
+          <a:lstStyle/>
+          <a:p>
+            <a:r>
               <a:rPr lang="en-US" sz="2200" b="1" dirty="0">
                 <a:latin typeface="Helvetica Light" panose="020B0403020202020204" pitchFamily="34" charset="0"/>
               </a:rPr>
-              <a:t>Practice script 2. </a:t>
+              <a:t>Practice script 3. </a:t>
             </a:r>
             <a:r>
               <a:rPr lang="en-US" sz="2200" dirty="0">
@@ -4641,7 +6026,7 @@
               <a:rPr lang="en-US" dirty="0">
                 <a:latin typeface="Helvetica Light" panose="020B0403020202020204" pitchFamily="34" charset="0"/>
               </a:rPr>
-              <a:t>function to prompt for the command line entry of two values from the command line.</a:t>
+              <a:t>function to prompt a user to enter a value for p (or q) from the command line.</a:t>
             </a:r>
           </a:p>
           <a:p>
@@ -4662,7 +6047,7 @@
               <a:rPr lang="en-US" dirty="0">
                 <a:latin typeface="Helvetica Light" panose="020B0403020202020204" pitchFamily="34" charset="0"/>
               </a:rPr>
-              <a:t>If you supply two values, e.g., 0.2 and 0.8, python will want to treat these as strings. So, before doing math you will need to convert them to floats </a:t>
+              <a:t>A value provided from command line will be treated as a string. So, before doing math you will need to convert to float </a:t>
             </a:r>
             <a:r>
               <a:rPr lang="en-US" b="1" dirty="0">
@@ -4701,7 +6086,13 @@
               <a:rPr lang="en-US" dirty="0">
                 <a:latin typeface="Helvetica Light" panose="020B0403020202020204" pitchFamily="34" charset="0"/>
               </a:rPr>
-              <a:t>As part of this exercise, you will need to control the precision of the floats printed (e.g., % %)</a:t>
+              <a:t>As part of this exercise, you will need to control the precision of the floats printed (e.g., </a:t>
+            </a:r>
+            <a:r>
+              <a:rPr lang="en-US">
+                <a:latin typeface="Helvetica Light" panose="020B0403020202020204" pitchFamily="34" charset="0"/>
+              </a:rPr>
+              <a:t>using f-string)</a:t>
             </a:r>
             <a:endParaRPr lang="en-US" b="1" dirty="0">
               <a:latin typeface="Helvetica Light" panose="020B0403020202020204" pitchFamily="34" charset="0"/>
@@ -4837,7 +6228,7 @@
 </p:sld>
 </file>
 
-<file path=ppt/slides/slide12.xml><?xml version="1.0" encoding="utf-8"?>
+<file path=ppt/slides/slide16.xml><?xml version="1.0" encoding="utf-8"?>
 <p:sld xmlns:a="http://schemas.openxmlformats.org/drawingml/2006/main" xmlns:r="http://schemas.openxmlformats.org/officeDocument/2006/relationships" xmlns:p="http://schemas.openxmlformats.org/presentationml/2006/main">
   <p:cSld>
     <p:spTree>
@@ -4856,203 +6247,20 @@
       </p:grpSpPr>
       <p:sp>
         <p:nvSpPr>
-          <p:cNvPr id="2" name="Rectangle 1">
-            <a:extLst>
-              <a:ext uri="{FF2B5EF4-FFF2-40B4-BE49-F238E27FC236}">
-                <a16:creationId xmlns:a16="http://schemas.microsoft.com/office/drawing/2014/main" id="{61C2B915-E064-284F-A5DB-4F28686FADAB}"/>
-              </a:ext>
-            </a:extLst>
-          </p:cNvPr>
-          <p:cNvSpPr/>
+          <p:cNvPr id="2" name="TextBox 1">
+            <a:extLst>
+              <a:ext uri="{FF2B5EF4-FFF2-40B4-BE49-F238E27FC236}">
+                <a16:creationId xmlns:a16="http://schemas.microsoft.com/office/drawing/2014/main" id="{F2506A35-DA43-FB4C-BEF3-FE4EEC3D95B4}"/>
+              </a:ext>
+            </a:extLst>
+          </p:cNvPr>
+          <p:cNvSpPr txBox="1"/>
           <p:nvPr/>
         </p:nvSpPr>
         <p:spPr>
           <a:xfrm>
-            <a:off x="1397876" y="1836321"/>
-            <a:ext cx="7924800" cy="1292662"/>
-          </a:xfrm>
-          <a:prstGeom prst="rect">
-            <a:avLst/>
-          </a:prstGeom>
-          <a:ln>
-            <a:solidFill>
-              <a:schemeClr val="accent1"/>
-            </a:solidFill>
-          </a:ln>
-        </p:spPr>
-        <p:txBody>
-          <a:bodyPr wrap="square">
-            <a:spAutoFit/>
-          </a:bodyPr>
-          <a:lstStyle/>
-          <a:p>
-            <a:r>
-              <a:rPr lang="en-US" sz="2600" dirty="0">
-                <a:latin typeface="Courier" pitchFamily="2" charset="0"/>
-              </a:rPr>
-              <a:t>name3 = input("Enter a string: ")</a:t>
-            </a:r>
-          </a:p>
-          <a:p>
-            <a:endParaRPr lang="en-US" sz="2600" dirty="0">
-              <a:latin typeface="Courier" pitchFamily="2" charset="0"/>
-            </a:endParaRPr>
-          </a:p>
-          <a:p>
-            <a:r>
-              <a:rPr lang="en-US" sz="2600" dirty="0">
-                <a:latin typeface="Courier" pitchFamily="2" charset="0"/>
-              </a:rPr>
-              <a:t>print(name3)</a:t>
-            </a:r>
-          </a:p>
-        </p:txBody>
-      </p:sp>
-      <p:sp>
-        <p:nvSpPr>
-          <p:cNvPr id="3" name="Rectangle 2">
-            <a:extLst>
-              <a:ext uri="{FF2B5EF4-FFF2-40B4-BE49-F238E27FC236}">
-                <a16:creationId xmlns:a16="http://schemas.microsoft.com/office/drawing/2014/main" id="{D446C60C-2780-A249-BFE2-FA1D120D6DB6}"/>
-              </a:ext>
-            </a:extLst>
-          </p:cNvPr>
-          <p:cNvSpPr/>
-          <p:nvPr/>
-        </p:nvSpPr>
-        <p:spPr>
-          <a:xfrm>
-            <a:off x="1397876" y="4140640"/>
-            <a:ext cx="7924800" cy="2092881"/>
-          </a:xfrm>
-          <a:prstGeom prst="rect">
-            <a:avLst/>
-          </a:prstGeom>
-          <a:ln>
-            <a:solidFill>
-              <a:schemeClr val="accent1"/>
-            </a:solidFill>
-          </a:ln>
-        </p:spPr>
-        <p:txBody>
-          <a:bodyPr wrap="square">
-            <a:spAutoFit/>
-          </a:bodyPr>
-          <a:lstStyle/>
-          <a:p>
-            <a:r>
-              <a:rPr lang="en-US" sz="2600" dirty="0">
-                <a:solidFill>
-                  <a:srgbClr val="002060"/>
-                </a:solidFill>
-                <a:latin typeface="Courier" pitchFamily="2" charset="0"/>
-              </a:rPr>
-              <a:t>‘Enter a string: ‘ prompt will appear at command line. Type a string</a:t>
-            </a:r>
-          </a:p>
-          <a:p>
-            <a:endParaRPr lang="en-US" sz="2600" dirty="0">
-              <a:solidFill>
-                <a:srgbClr val="002060"/>
-              </a:solidFill>
-              <a:latin typeface="Courier" pitchFamily="2" charset="0"/>
-            </a:endParaRPr>
-          </a:p>
-          <a:p>
-            <a:r>
-              <a:rPr lang="en-US" sz="2600" dirty="0">
-                <a:solidFill>
-                  <a:srgbClr val="002060"/>
-                </a:solidFill>
-                <a:latin typeface="Courier" pitchFamily="2" charset="0"/>
-              </a:rPr>
-              <a:t>If ‘Burrow’ is typed and Enter hit,</a:t>
-            </a:r>
-          </a:p>
-          <a:p>
-            <a:r>
-              <a:rPr lang="en-US" sz="2600" dirty="0">
-                <a:solidFill>
-                  <a:srgbClr val="002060"/>
-                </a:solidFill>
-                <a:latin typeface="Courier" pitchFamily="2" charset="0"/>
-              </a:rPr>
-              <a:t>‘Burrow’ should print to screen</a:t>
-            </a:r>
-          </a:p>
-        </p:txBody>
-      </p:sp>
-      <p:sp>
-        <p:nvSpPr>
-          <p:cNvPr id="6" name="Rectangle 5">
-            <a:extLst>
-              <a:ext uri="{FF2B5EF4-FFF2-40B4-BE49-F238E27FC236}">
-                <a16:creationId xmlns:a16="http://schemas.microsoft.com/office/drawing/2014/main" id="{D59BBFBD-9BEB-1243-BC42-5A02EA92B35E}"/>
-              </a:ext>
-            </a:extLst>
-          </p:cNvPr>
-          <p:cNvSpPr/>
-          <p:nvPr/>
-        </p:nvSpPr>
-        <p:spPr>
-          <a:xfrm>
-            <a:off x="1332303" y="364500"/>
-            <a:ext cx="9910085" cy="584775"/>
-          </a:xfrm>
-          <a:prstGeom prst="rect">
-            <a:avLst/>
-          </a:prstGeom>
-        </p:spPr>
-        <p:txBody>
-          <a:bodyPr wrap="none">
-            <a:spAutoFit/>
-          </a:bodyPr>
-          <a:lstStyle/>
-          <a:p>
-            <a:r>
-              <a:rPr lang="en-US" sz="3200" b="1" dirty="0">
-                <a:solidFill>
-                  <a:srgbClr val="333333"/>
-                </a:solidFill>
-                <a:latin typeface="HELVETICA LIGHT" panose="020B0403020202020204" pitchFamily="34" charset="0"/>
-              </a:rPr>
-              <a:t>Pulling raw input from the command line </a:t>
-            </a:r>
-            <a:r>
-              <a:rPr lang="en-US" sz="3200" b="1" dirty="0">
-                <a:solidFill>
-                  <a:srgbClr val="333333"/>
-                </a:solidFill>
-                <a:latin typeface="Courier" pitchFamily="2" charset="0"/>
-              </a:rPr>
-              <a:t>(input())</a:t>
-            </a:r>
-            <a:endParaRPr lang="en-US" sz="3200" b="1" dirty="0">
-              <a:solidFill>
-                <a:srgbClr val="333333"/>
-              </a:solidFill>
-              <a:effectLst/>
-              <a:latin typeface="Courier" pitchFamily="2" charset="0"/>
-            </a:endParaRPr>
-          </a:p>
-        </p:txBody>
-      </p:sp>
-      <p:sp>
-        <p:nvSpPr>
-          <p:cNvPr id="7" name="TextBox 6">
-            <a:extLst>
-              <a:ext uri="{FF2B5EF4-FFF2-40B4-BE49-F238E27FC236}">
-                <a16:creationId xmlns:a16="http://schemas.microsoft.com/office/drawing/2014/main" id="{A83C82C0-485D-454E-AE1B-2D525EBB7573}"/>
-              </a:ext>
-            </a:extLst>
-          </p:cNvPr>
-          <p:cNvSpPr txBox="1"/>
-          <p:nvPr/>
-        </p:nvSpPr>
-        <p:spPr>
-          <a:xfrm>
-            <a:off x="1332303" y="1302050"/>
-            <a:ext cx="1670650" cy="492443"/>
+            <a:off x="882925" y="433160"/>
+            <a:ext cx="2071401" cy="553998"/>
           </a:xfrm>
           <a:prstGeom prst="rect">
             <a:avLst/>
@@ -5066,20 +6274,20 @@
           <a:lstStyle/>
           <a:p>
             <a:r>
-              <a:rPr lang="en-US" sz="2600" dirty="0">
-                <a:latin typeface="Helvetica Light" panose="020B0403020202020204" pitchFamily="34" charset="0"/>
-              </a:rPr>
-              <a:t>In Python:</a:t>
-            </a:r>
-          </a:p>
-        </p:txBody>
-      </p:sp>
-      <p:sp>
-        <p:nvSpPr>
-          <p:cNvPr id="8" name="TextBox 7">
-            <a:extLst>
-              <a:ext uri="{FF2B5EF4-FFF2-40B4-BE49-F238E27FC236}">
-                <a16:creationId xmlns:a16="http://schemas.microsoft.com/office/drawing/2014/main" id="{9C8DC85D-EDA8-5C43-BF1B-DCEEE2CD8A89}"/>
+              <a:rPr lang="en-US" sz="3000" b="1" dirty="0">
+                <a:latin typeface="Helvetica Light" panose="020B0403020202020204" pitchFamily="34" charset="0"/>
+              </a:rPr>
+              <a:t>This week:</a:t>
+            </a:r>
+          </a:p>
+        </p:txBody>
+      </p:sp>
+      <p:sp>
+        <p:nvSpPr>
+          <p:cNvPr id="3" name="TextBox 2">
+            <a:extLst>
+              <a:ext uri="{FF2B5EF4-FFF2-40B4-BE49-F238E27FC236}">
+                <a16:creationId xmlns:a16="http://schemas.microsoft.com/office/drawing/2014/main" id="{26A6A57C-3E55-AB49-8F7A-BD8712B63F69}"/>
               </a:ext>
             </a:extLst>
           </p:cNvPr>
@@ -5088,8 +6296,8 @@
         </p:nvSpPr>
         <p:spPr>
           <a:xfrm>
-            <a:off x="1332303" y="3648197"/>
-            <a:ext cx="3967753" cy="492443"/>
+            <a:off x="782563" y="1541156"/>
+            <a:ext cx="10267121" cy="2492990"/>
           </a:xfrm>
           <a:prstGeom prst="rect">
             <a:avLst/>
@@ -5097,19 +6305,145 @@
           <a:noFill/>
         </p:spPr>
         <p:txBody>
+          <a:bodyPr wrap="square" rtlCol="0">
+            <a:spAutoFit/>
+          </a:bodyPr>
+          <a:lstStyle/>
+          <a:p>
+            <a:endParaRPr lang="en-US" sz="2600" dirty="0">
+              <a:latin typeface="Helvetica Light" panose="020B0403020202020204" pitchFamily="34" charset="0"/>
+            </a:endParaRPr>
+          </a:p>
+          <a:p>
+            <a:pPr marL="514350" indent="-514350">
+              <a:buAutoNum type="arabicPeriod"/>
+            </a:pPr>
+            <a:r>
+              <a:rPr lang="en-US" sz="2600" dirty="0">
+                <a:latin typeface="Helvetica Light" panose="020B0403020202020204" pitchFamily="34" charset="0"/>
+              </a:rPr>
+              <a:t>python_1_primer.ipynb</a:t>
+            </a:r>
+          </a:p>
+          <a:p>
+            <a:pPr marL="514350" indent="-514350">
+              <a:buAutoNum type="arabicPeriod"/>
+            </a:pPr>
+            <a:endParaRPr lang="en-US" sz="2600" dirty="0">
+              <a:latin typeface="Helvetica Light" panose="020B0403020202020204" pitchFamily="34" charset="0"/>
+            </a:endParaRPr>
+          </a:p>
+          <a:p>
+            <a:pPr marL="514350" indent="-514350">
+              <a:buFontTx/>
+              <a:buAutoNum type="arabicPeriod"/>
+            </a:pPr>
+            <a:r>
+              <a:rPr lang="en-US" sz="2600" dirty="0">
+                <a:latin typeface="Helvetica Light" panose="020B0403020202020204" pitchFamily="34" charset="0"/>
+              </a:rPr>
+              <a:t>assignment_python1.md</a:t>
+            </a:r>
+          </a:p>
+          <a:p>
+            <a:pPr lvl="1"/>
+            <a:endParaRPr lang="en-US" sz="2600" dirty="0">
+              <a:latin typeface="Helvetica Light" panose="020B0403020202020204" pitchFamily="34" charset="0"/>
+            </a:endParaRPr>
+          </a:p>
+          <a:p>
+            <a:pPr lvl="1"/>
+            <a:r>
+              <a:rPr lang="en-US" sz="2600" b="1" dirty="0">
+                <a:latin typeface="Helvetica Light" panose="020B0403020202020204" pitchFamily="34" charset="0"/>
+              </a:rPr>
+              <a:t>Email me </a:t>
+            </a:r>
+            <a:r>
+              <a:rPr lang="en-US" sz="2600" b="1" dirty="0" err="1">
+                <a:latin typeface="Helvetica Light" panose="020B0403020202020204" pitchFamily="34" charset="0"/>
+              </a:rPr>
+              <a:t>jupyter</a:t>
+            </a:r>
+            <a:r>
+              <a:rPr lang="en-US" sz="2600" b="1" dirty="0">
+                <a:latin typeface="Helvetica Light" panose="020B0403020202020204" pitchFamily="34" charset="0"/>
+              </a:rPr>
+              <a:t> notebook or scripts for 1, 2, 3.</a:t>
+            </a:r>
+          </a:p>
+        </p:txBody>
+      </p:sp>
+      <p:sp>
+        <p:nvSpPr>
+          <p:cNvPr id="4" name="TextBox 3">
+            <a:extLst>
+              <a:ext uri="{FF2B5EF4-FFF2-40B4-BE49-F238E27FC236}">
+                <a16:creationId xmlns:a16="http://schemas.microsoft.com/office/drawing/2014/main" id="{8B2F650B-8D6C-4741-BB29-74826F1F6CC7}"/>
+              </a:ext>
+            </a:extLst>
+          </p:cNvPr>
+          <p:cNvSpPr txBox="1"/>
+          <p:nvPr/>
+        </p:nvSpPr>
+        <p:spPr>
+          <a:xfrm>
+            <a:off x="882924" y="5069129"/>
+            <a:ext cx="2157963" cy="553998"/>
+          </a:xfrm>
+          <a:prstGeom prst="rect">
+            <a:avLst/>
+          </a:prstGeom>
+          <a:noFill/>
+        </p:spPr>
+        <p:txBody>
           <a:bodyPr wrap="none" rtlCol="0">
             <a:spAutoFit/>
           </a:bodyPr>
           <a:lstStyle/>
           <a:p>
             <a:r>
-              <a:rPr lang="en-US" sz="2600" dirty="0">
-                <a:solidFill>
-                  <a:srgbClr val="002060"/>
-                </a:solidFill>
-                <a:latin typeface="Helvetica Light" panose="020B0403020202020204" pitchFamily="34" charset="0"/>
-              </a:rPr>
-              <a:t>At command line prompt:</a:t>
+              <a:rPr lang="en-US" sz="3000" b="1" dirty="0">
+                <a:latin typeface="Helvetica Light" panose="020B0403020202020204" pitchFamily="34" charset="0"/>
+              </a:rPr>
+              <a:t>Next week:</a:t>
+            </a:r>
+          </a:p>
+        </p:txBody>
+      </p:sp>
+      <p:sp>
+        <p:nvSpPr>
+          <p:cNvPr id="6" name="TextBox 5">
+            <a:extLst>
+              <a:ext uri="{FF2B5EF4-FFF2-40B4-BE49-F238E27FC236}">
+                <a16:creationId xmlns:a16="http://schemas.microsoft.com/office/drawing/2014/main" id="{2C6384E4-4E42-FA41-BC9C-1CEB2899F41A}"/>
+              </a:ext>
+            </a:extLst>
+          </p:cNvPr>
+          <p:cNvSpPr txBox="1"/>
+          <p:nvPr/>
+        </p:nvSpPr>
+        <p:spPr>
+          <a:xfrm>
+            <a:off x="882924" y="5623127"/>
+            <a:ext cx="10267121" cy="523220"/>
+          </a:xfrm>
+          <a:prstGeom prst="rect">
+            <a:avLst/>
+          </a:prstGeom>
+          <a:noFill/>
+        </p:spPr>
+        <p:txBody>
+          <a:bodyPr wrap="square" rtlCol="0">
+            <a:spAutoFit/>
+          </a:bodyPr>
+          <a:lstStyle/>
+          <a:p>
+            <a:r>
+              <a:rPr lang="en-US" sz="2800" dirty="0">
+                <a:latin typeface="Helvetica Light" panose="020B0403020202020204" pitchFamily="34" charset="0"/>
+              </a:rPr>
+              <a:t>lists, conditionals, loops </a:t>
             </a:r>
           </a:p>
         </p:txBody>
@@ -5117,7 +6451,7 @@
     </p:spTree>
     <p:extLst>
       <p:ext uri="{BB962C8B-B14F-4D97-AF65-F5344CB8AC3E}">
-        <p14:creationId xmlns:p14="http://schemas.microsoft.com/office/powerpoint/2010/main" val="20693727"/>
+        <p14:creationId xmlns:p14="http://schemas.microsoft.com/office/powerpoint/2010/main" val="1633021312"/>
       </p:ext>
     </p:extLst>
   </p:cSld>
@@ -5127,7 +6461,7 @@
 </p:sld>
 </file>
 
-<file path=ppt/slides/slide13.xml><?xml version="1.0" encoding="utf-8"?>
+<file path=ppt/slides/slide17.xml><?xml version="1.0" encoding="utf-8"?>
 <p:sld xmlns:a="http://schemas.openxmlformats.org/drawingml/2006/main" xmlns:r="http://schemas.openxmlformats.org/officeDocument/2006/relationships" xmlns:p="http://schemas.openxmlformats.org/presentationml/2006/main">
   <p:cSld>
     <p:spTree>
@@ -5158,227 +6492,6 @@
         </p:nvSpPr>
         <p:spPr>
           <a:xfrm>
-            <a:off x="882925" y="433160"/>
-            <a:ext cx="2071401" cy="553998"/>
-          </a:xfrm>
-          <a:prstGeom prst="rect">
-            <a:avLst/>
-          </a:prstGeom>
-          <a:noFill/>
-        </p:spPr>
-        <p:txBody>
-          <a:bodyPr wrap="none" rtlCol="0">
-            <a:spAutoFit/>
-          </a:bodyPr>
-          <a:lstStyle/>
-          <a:p>
-            <a:r>
-              <a:rPr lang="en-US" sz="3000" b="1" dirty="0">
-                <a:latin typeface="Helvetica Light" panose="020B0403020202020204" pitchFamily="34" charset="0"/>
-              </a:rPr>
-              <a:t>This week:</a:t>
-            </a:r>
-          </a:p>
-        </p:txBody>
-      </p:sp>
-      <p:sp>
-        <p:nvSpPr>
-          <p:cNvPr id="3" name="TextBox 2">
-            <a:extLst>
-              <a:ext uri="{FF2B5EF4-FFF2-40B4-BE49-F238E27FC236}">
-                <a16:creationId xmlns:a16="http://schemas.microsoft.com/office/drawing/2014/main" id="{26A6A57C-3E55-AB49-8F7A-BD8712B63F69}"/>
-              </a:ext>
-            </a:extLst>
-          </p:cNvPr>
-          <p:cNvSpPr txBox="1"/>
-          <p:nvPr/>
-        </p:nvSpPr>
-        <p:spPr>
-          <a:xfrm>
-            <a:off x="782563" y="1541156"/>
-            <a:ext cx="10267121" cy="2492990"/>
-          </a:xfrm>
-          <a:prstGeom prst="rect">
-            <a:avLst/>
-          </a:prstGeom>
-          <a:noFill/>
-        </p:spPr>
-        <p:txBody>
-          <a:bodyPr wrap="square" rtlCol="0">
-            <a:spAutoFit/>
-          </a:bodyPr>
-          <a:lstStyle/>
-          <a:p>
-            <a:endParaRPr lang="en-US" sz="2600" dirty="0">
-              <a:latin typeface="Helvetica Light" panose="020B0403020202020204" pitchFamily="34" charset="0"/>
-            </a:endParaRPr>
-          </a:p>
-          <a:p>
-            <a:pPr marL="514350" indent="-514350">
-              <a:buAutoNum type="arabicPeriod"/>
-            </a:pPr>
-            <a:r>
-              <a:rPr lang="en-US" sz="2600" dirty="0">
-                <a:latin typeface="Helvetica Light" panose="020B0403020202020204" pitchFamily="34" charset="0"/>
-              </a:rPr>
-              <a:t>python_1_primer.ipynb</a:t>
-            </a:r>
-          </a:p>
-          <a:p>
-            <a:pPr marL="514350" indent="-514350">
-              <a:buAutoNum type="arabicPeriod"/>
-            </a:pPr>
-            <a:endParaRPr lang="en-US" sz="2600" dirty="0">
-              <a:latin typeface="Helvetica Light" panose="020B0403020202020204" pitchFamily="34" charset="0"/>
-            </a:endParaRPr>
-          </a:p>
-          <a:p>
-            <a:pPr marL="514350" indent="-514350">
-              <a:buFontTx/>
-              <a:buAutoNum type="arabicPeriod"/>
-            </a:pPr>
-            <a:r>
-              <a:rPr lang="en-US" sz="2600" dirty="0">
-                <a:latin typeface="Helvetica Light" panose="020B0403020202020204" pitchFamily="34" charset="0"/>
-              </a:rPr>
-              <a:t>assignment_python1.md</a:t>
-            </a:r>
-          </a:p>
-          <a:p>
-            <a:pPr lvl="1"/>
-            <a:endParaRPr lang="en-US" sz="2600" dirty="0">
-              <a:latin typeface="Helvetica Light" panose="020B0403020202020204" pitchFamily="34" charset="0"/>
-            </a:endParaRPr>
-          </a:p>
-          <a:p>
-            <a:pPr lvl="1"/>
-            <a:r>
-              <a:rPr lang="en-US" sz="2600" b="1" dirty="0">
-                <a:latin typeface="Helvetica Light" panose="020B0403020202020204" pitchFamily="34" charset="0"/>
-              </a:rPr>
-              <a:t>Email me code for #2 and #3.</a:t>
-            </a:r>
-          </a:p>
-        </p:txBody>
-      </p:sp>
-      <p:sp>
-        <p:nvSpPr>
-          <p:cNvPr id="4" name="TextBox 3">
-            <a:extLst>
-              <a:ext uri="{FF2B5EF4-FFF2-40B4-BE49-F238E27FC236}">
-                <a16:creationId xmlns:a16="http://schemas.microsoft.com/office/drawing/2014/main" id="{8B2F650B-8D6C-4741-BB29-74826F1F6CC7}"/>
-              </a:ext>
-            </a:extLst>
-          </p:cNvPr>
-          <p:cNvSpPr txBox="1"/>
-          <p:nvPr/>
-        </p:nvSpPr>
-        <p:spPr>
-          <a:xfrm>
-            <a:off x="882924" y="5069129"/>
-            <a:ext cx="2157963" cy="553998"/>
-          </a:xfrm>
-          <a:prstGeom prst="rect">
-            <a:avLst/>
-          </a:prstGeom>
-          <a:noFill/>
-        </p:spPr>
-        <p:txBody>
-          <a:bodyPr wrap="none" rtlCol="0">
-            <a:spAutoFit/>
-          </a:bodyPr>
-          <a:lstStyle/>
-          <a:p>
-            <a:r>
-              <a:rPr lang="en-US" sz="3000" b="1" dirty="0">
-                <a:latin typeface="Helvetica Light" panose="020B0403020202020204" pitchFamily="34" charset="0"/>
-              </a:rPr>
-              <a:t>Next week:</a:t>
-            </a:r>
-          </a:p>
-        </p:txBody>
-      </p:sp>
-      <p:sp>
-        <p:nvSpPr>
-          <p:cNvPr id="6" name="TextBox 5">
-            <a:extLst>
-              <a:ext uri="{FF2B5EF4-FFF2-40B4-BE49-F238E27FC236}">
-                <a16:creationId xmlns:a16="http://schemas.microsoft.com/office/drawing/2014/main" id="{2C6384E4-4E42-FA41-BC9C-1CEB2899F41A}"/>
-              </a:ext>
-            </a:extLst>
-          </p:cNvPr>
-          <p:cNvSpPr txBox="1"/>
-          <p:nvPr/>
-        </p:nvSpPr>
-        <p:spPr>
-          <a:xfrm>
-            <a:off x="882924" y="5623127"/>
-            <a:ext cx="10267121" cy="523220"/>
-          </a:xfrm>
-          <a:prstGeom prst="rect">
-            <a:avLst/>
-          </a:prstGeom>
-          <a:noFill/>
-        </p:spPr>
-        <p:txBody>
-          <a:bodyPr wrap="square" rtlCol="0">
-            <a:spAutoFit/>
-          </a:bodyPr>
-          <a:lstStyle/>
-          <a:p>
-            <a:r>
-              <a:rPr lang="en-US" sz="2800" dirty="0">
-                <a:latin typeface="Helvetica Light" panose="020B0403020202020204" pitchFamily="34" charset="0"/>
-              </a:rPr>
-              <a:t>lists, conditionals, loops </a:t>
-            </a:r>
-          </a:p>
-        </p:txBody>
-      </p:sp>
-    </p:spTree>
-    <p:extLst>
-      <p:ext uri="{BB962C8B-B14F-4D97-AF65-F5344CB8AC3E}">
-        <p14:creationId xmlns:p14="http://schemas.microsoft.com/office/powerpoint/2010/main" val="1633021312"/>
-      </p:ext>
-    </p:extLst>
-  </p:cSld>
-  <p:clrMapOvr>
-    <a:masterClrMapping/>
-  </p:clrMapOvr>
-</p:sld>
-</file>
-
-<file path=ppt/slides/slide14.xml><?xml version="1.0" encoding="utf-8"?>
-<p:sld xmlns:a="http://schemas.openxmlformats.org/drawingml/2006/main" xmlns:r="http://schemas.openxmlformats.org/officeDocument/2006/relationships" xmlns:p="http://schemas.openxmlformats.org/presentationml/2006/main">
-  <p:cSld>
-    <p:spTree>
-      <p:nvGrpSpPr>
-        <p:cNvPr id="1" name=""/>
-        <p:cNvGrpSpPr/>
-        <p:nvPr/>
-      </p:nvGrpSpPr>
-      <p:grpSpPr>
-        <a:xfrm>
-          <a:off x="0" y="0"/>
-          <a:ext cx="0" cy="0"/>
-          <a:chOff x="0" y="0"/>
-          <a:chExt cx="0" cy="0"/>
-        </a:xfrm>
-      </p:grpSpPr>
-      <p:sp>
-        <p:nvSpPr>
-          <p:cNvPr id="2" name="TextBox 1">
-            <a:extLst>
-              <a:ext uri="{FF2B5EF4-FFF2-40B4-BE49-F238E27FC236}">
-                <a16:creationId xmlns:a16="http://schemas.microsoft.com/office/drawing/2014/main" id="{F2506A35-DA43-FB4C-BEF3-FE4EEC3D95B4}"/>
-              </a:ext>
-            </a:extLst>
-          </p:cNvPr>
-          <p:cNvSpPr txBox="1"/>
-          <p:nvPr/>
-        </p:nvSpPr>
-        <p:spPr>
-          <a:xfrm>
             <a:off x="882925" y="262338"/>
             <a:ext cx="3515706" cy="553998"/>
           </a:xfrm>
@@ -5417,7 +6530,7 @@
         <p:spPr>
           <a:xfrm>
             <a:off x="496276" y="1002094"/>
-            <a:ext cx="11390924" cy="5309146"/>
+            <a:ext cx="11390924" cy="4955203"/>
           </a:xfrm>
           <a:prstGeom prst="rect">
             <a:avLst/>
@@ -5434,7 +6547,7 @@
               <a:rPr lang="en-US" sz="2300" b="1" dirty="0">
                 <a:latin typeface="Helvetica Light" panose="020B0403020202020204" pitchFamily="34" charset="0"/>
               </a:rPr>
-              <a:t>I.1-2 pager independent project description along with python3 assignment next week (by 10/15)</a:t>
+              <a:t>I.1-2 pager independent project description by mid October</a:t>
             </a:r>
           </a:p>
           <a:p>
@@ -5585,9 +6698,12 @@
               <a:buFontTx/>
               <a:buChar char="-"/>
             </a:pPr>
-            <a:endParaRPr lang="en-US" sz="2000" dirty="0">
-              <a:latin typeface="Helvetica Light" panose="020B0403020202020204" pitchFamily="34" charset="0"/>
-            </a:endParaRPr>
+            <a:r>
+              <a:rPr lang="en-US" sz="2000" dirty="0">
+                <a:latin typeface="Helvetica Light" panose="020B0403020202020204" pitchFamily="34" charset="0"/>
+              </a:rPr>
+              <a:t>Design something new to automate commonly required tasks for your labs research workflow.</a:t>
+            </a:r>
           </a:p>
           <a:p>
             <a:pPr marL="342900" indent="-342900">
@@ -6159,10 +7275,10 @@
       </p:grpSpPr>
       <p:sp>
         <p:nvSpPr>
-          <p:cNvPr id="2" name="TextBox 1">
-            <a:extLst>
-              <a:ext uri="{FF2B5EF4-FFF2-40B4-BE49-F238E27FC236}">
-                <a16:creationId xmlns:a16="http://schemas.microsoft.com/office/drawing/2014/main" id="{6CC28B14-71D3-284A-B530-F620DCCC2513}"/>
+          <p:cNvPr id="3" name="TextBox 2">
+            <a:extLst>
+              <a:ext uri="{FF2B5EF4-FFF2-40B4-BE49-F238E27FC236}">
+                <a16:creationId xmlns:a16="http://schemas.microsoft.com/office/drawing/2014/main" id="{04DD074F-442B-A0A6-965E-EEEBCBAD3D73}"/>
               </a:ext>
             </a:extLst>
           </p:cNvPr>
@@ -6171,8 +7287,8 @@
         </p:nvSpPr>
         <p:spPr>
           <a:xfrm>
-            <a:off x="4887977" y="237986"/>
-            <a:ext cx="2416046" cy="584775"/>
+            <a:off x="644324" y="307145"/>
+            <a:ext cx="10903352" cy="1015663"/>
           </a:xfrm>
           <a:prstGeom prst="rect">
             <a:avLst/>
@@ -6180,32 +7296,40 @@
           <a:noFill/>
         </p:spPr>
         <p:txBody>
-          <a:bodyPr wrap="none" rtlCol="0">
+          <a:bodyPr wrap="square">
             <a:spAutoFit/>
           </a:bodyPr>
           <a:lstStyle/>
           <a:p>
-            <a:r>
-              <a:rPr lang="en-US" sz="3200" dirty="0" err="1">
-                <a:latin typeface="Helvetica Light" panose="020B0403020202020204" pitchFamily="34" charset="0"/>
-              </a:rPr>
-              <a:t>Ipy</a:t>
-            </a:r>
-            <a:r>
-              <a:rPr lang="en-US" sz="3200" dirty="0">
-                <a:latin typeface="Helvetica Light" panose="020B0403020202020204" pitchFamily="34" charset="0"/>
-              </a:rPr>
-              <a:t> console </a:t>
-            </a:r>
-          </a:p>
-        </p:txBody>
-      </p:sp>
-      <p:sp>
-        <p:nvSpPr>
-          <p:cNvPr id="5" name="TextBox 4">
-            <a:extLst>
-              <a:ext uri="{FF2B5EF4-FFF2-40B4-BE49-F238E27FC236}">
-                <a16:creationId xmlns:a16="http://schemas.microsoft.com/office/drawing/2014/main" id="{2BA3819C-7CA5-BF45-9CD1-3A9F60B3CBBF}"/>
+            <a:pPr algn="ctr">
+              <a:buNone/>
+            </a:pPr>
+            <a:r>
+              <a:rPr lang="en-US" sz="3200" b="1" dirty="0">
+                <a:latin typeface="HELVETICA LIGHT" panose="020B0403020202020204" pitchFamily="34" charset="0"/>
+              </a:rPr>
+              <a:t>Three ways to run python</a:t>
+            </a:r>
+          </a:p>
+          <a:p>
+            <a:pPr algn="ctr">
+              <a:buNone/>
+            </a:pPr>
+            <a:r>
+              <a:rPr lang="en-US" sz="2800" dirty="0">
+                <a:latin typeface="Helvetica Light" panose="020B0403020202020204" pitchFamily="34" charset="0"/>
+              </a:rPr>
+              <a:t>Same code, used in different environments</a:t>
+            </a:r>
+          </a:p>
+        </p:txBody>
+      </p:sp>
+      <p:sp>
+        <p:nvSpPr>
+          <p:cNvPr id="4" name="TextBox 3">
+            <a:extLst>
+              <a:ext uri="{FF2B5EF4-FFF2-40B4-BE49-F238E27FC236}">
+                <a16:creationId xmlns:a16="http://schemas.microsoft.com/office/drawing/2014/main" id="{75EB980A-4BB5-4CB8-6F41-B727D147E848}"/>
               </a:ext>
             </a:extLst>
           </p:cNvPr>
@@ -6214,8 +7338,8 @@
         </p:nvSpPr>
         <p:spPr>
           <a:xfrm>
-            <a:off x="9422296" y="1576781"/>
-            <a:ext cx="2769704" cy="923330"/>
+            <a:off x="748496" y="1585195"/>
+            <a:ext cx="10903352" cy="892552"/>
           </a:xfrm>
           <a:prstGeom prst="rect">
             <a:avLst/>
@@ -6223,57 +7347,49 @@
           <a:noFill/>
         </p:spPr>
         <p:txBody>
-          <a:bodyPr wrap="square" rtlCol="0">
+          <a:bodyPr wrap="square">
             <a:spAutoFit/>
           </a:bodyPr>
           <a:lstStyle/>
           <a:p>
             <a:r>
-              <a:rPr lang="en-US" dirty="0">
-                <a:latin typeface="Helvetica Light" panose="020B0403020202020204" pitchFamily="34" charset="0"/>
-              </a:rPr>
-              <a:t>Launch </a:t>
-            </a:r>
-            <a:r>
-              <a:rPr lang="en-US" b="1" dirty="0" err="1">
-                <a:latin typeface="Helvetica Light" panose="020B0403020202020204" pitchFamily="34" charset="0"/>
-              </a:rPr>
-              <a:t>Jupyter</a:t>
-            </a:r>
-            <a:r>
-              <a:rPr lang="en-US" b="1" dirty="0">
-                <a:latin typeface="Helvetica Light" panose="020B0403020202020204" pitchFamily="34" charset="0"/>
-              </a:rPr>
-              <a:t> </a:t>
-            </a:r>
-            <a:r>
-              <a:rPr lang="en-US" b="1" dirty="0" err="1">
-                <a:latin typeface="Helvetica Light" panose="020B0403020202020204" pitchFamily="34" charset="0"/>
-              </a:rPr>
-              <a:t>Qtconsole</a:t>
-            </a:r>
-            <a:r>
-              <a:rPr lang="en-US" b="1" dirty="0">
-                <a:latin typeface="Helvetica Light" panose="020B0403020202020204" pitchFamily="34" charset="0"/>
-              </a:rPr>
-              <a:t> </a:t>
-            </a:r>
-            <a:r>
-              <a:rPr lang="en-US" dirty="0">
-                <a:latin typeface="Helvetica Light" panose="020B0403020202020204" pitchFamily="34" charset="0"/>
-              </a:rPr>
-              <a:t>from Anaconda navigator</a:t>
-            </a:r>
-            <a:endParaRPr lang="en-US" dirty="0"/>
-          </a:p>
-        </p:txBody>
-      </p:sp>
-      <p:sp>
-        <p:nvSpPr>
-          <p:cNvPr id="6" name="TextBox 5">
-            <a:extLst>
-              <a:ext uri="{FF2B5EF4-FFF2-40B4-BE49-F238E27FC236}">
-                <a16:creationId xmlns:a16="http://schemas.microsoft.com/office/drawing/2014/main" id="{77406E1E-FB6B-4440-A6B8-A722C51816BC}"/>
+              <a:rPr lang="en-US" sz="2600" b="1" dirty="0">
+                <a:latin typeface="HELVETICA LIGHT" panose="020B0403020202020204" pitchFamily="34" charset="0"/>
+              </a:rPr>
+              <a:t>1. Python scripts (.</a:t>
+            </a:r>
+            <a:r>
+              <a:rPr lang="en-US" sz="2600" b="1" dirty="0" err="1">
+                <a:latin typeface="HELVETICA LIGHT" panose="020B0403020202020204" pitchFamily="34" charset="0"/>
+              </a:rPr>
+              <a:t>py</a:t>
+            </a:r>
+            <a:r>
+              <a:rPr lang="en-US" sz="2600" b="1" dirty="0">
+                <a:latin typeface="HELVETICA LIGHT" panose="020B0403020202020204" pitchFamily="34" charset="0"/>
+              </a:rPr>
+              <a:t>)</a:t>
+            </a:r>
+            <a:br>
+              <a:rPr lang="en-US" sz="2600" dirty="0">
+                <a:latin typeface="Helvetica Light" panose="020B0403020202020204" pitchFamily="34" charset="0"/>
+              </a:rPr>
+            </a:br>
+            <a:r>
+              <a:rPr lang="en-US" sz="2400" dirty="0">
+                <a:latin typeface="Helvetica Light" panose="020B0403020202020204" pitchFamily="34" charset="0"/>
+              </a:rPr>
+              <a:t>Write and save a complete program, run it from the terminal</a:t>
+            </a:r>
+          </a:p>
+        </p:txBody>
+      </p:sp>
+      <p:sp>
+        <p:nvSpPr>
+          <p:cNvPr id="5" name="TextBox 4">
+            <a:extLst>
+              <a:ext uri="{FF2B5EF4-FFF2-40B4-BE49-F238E27FC236}">
+                <a16:creationId xmlns:a16="http://schemas.microsoft.com/office/drawing/2014/main" id="{5DFB7288-C4A7-E9A3-9CA8-5C37FB28A153}"/>
               </a:ext>
             </a:extLst>
           </p:cNvPr>
@@ -6282,8 +7398,8 @@
         </p:nvSpPr>
         <p:spPr>
           <a:xfrm>
-            <a:off x="9288347" y="3229556"/>
-            <a:ext cx="2454965" cy="2492990"/>
+            <a:off x="780580" y="3370999"/>
+            <a:ext cx="10903352" cy="861774"/>
           </a:xfrm>
           <a:prstGeom prst="rect">
             <a:avLst/>
@@ -6291,59 +7407,105 @@
           <a:noFill/>
         </p:spPr>
         <p:txBody>
-          <a:bodyPr wrap="square" rtlCol="0">
+          <a:bodyPr wrap="square">
             <a:spAutoFit/>
           </a:bodyPr>
           <a:lstStyle/>
           <a:p>
             <a:r>
-              <a:rPr lang="en-US" sz="2600" dirty="0">
-                <a:latin typeface="Helvetica Light" panose="020B0403020202020204" pitchFamily="34" charset="0"/>
-              </a:rPr>
-              <a:t>Amazingly useful for testing code while you are building your scripts</a:t>
-            </a:r>
-            <a:endParaRPr lang="en-US" sz="2600" dirty="0">
-              <a:latin typeface="Courier New" panose="02070309020205020404" pitchFamily="49" charset="0"/>
-              <a:cs typeface="Courier New" panose="02070309020205020404" pitchFamily="49" charset="0"/>
-            </a:endParaRPr>
-          </a:p>
-        </p:txBody>
-      </p:sp>
-      <p:pic>
-        <p:nvPicPr>
-          <p:cNvPr id="8" name="Picture 7" descr="Text&#10;&#10;Description automatically generated with low confidence">
-            <a:extLst>
-              <a:ext uri="{FF2B5EF4-FFF2-40B4-BE49-F238E27FC236}">
-                <a16:creationId xmlns:a16="http://schemas.microsoft.com/office/drawing/2014/main" id="{74D1C905-9C60-E144-8711-9CB9C8FFF47B}"/>
-              </a:ext>
-            </a:extLst>
-          </p:cNvPr>
-          <p:cNvPicPr>
-            <a:picLocks noChangeAspect="1"/>
-          </p:cNvPicPr>
+              <a:rPr lang="en-US" sz="2600" b="1" dirty="0">
+                <a:latin typeface="HELVETICA LIGHT" panose="020B0403020202020204" pitchFamily="34" charset="0"/>
+              </a:rPr>
+              <a:t>2. Interactive Python</a:t>
+            </a:r>
+            <a:br>
+              <a:rPr lang="en-US" sz="2800" dirty="0">
+                <a:latin typeface="Helvetica Light" panose="020B0403020202020204" pitchFamily="34" charset="0"/>
+              </a:rPr>
+            </a:br>
+            <a:r>
+              <a:rPr lang="en-US" sz="2400" dirty="0">
+                <a:latin typeface="Helvetica Light" panose="020B0403020202020204" pitchFamily="34" charset="0"/>
+              </a:rPr>
+              <a:t>Start Python from the terminal or </a:t>
+            </a:r>
+            <a:r>
+              <a:rPr lang="en-US" sz="2400" dirty="0" err="1">
+                <a:latin typeface="Helvetica Light" panose="020B0403020202020204" pitchFamily="34" charset="0"/>
+              </a:rPr>
+              <a:t>Ipy</a:t>
+            </a:r>
+            <a:r>
+              <a:rPr lang="en-US" sz="2400" dirty="0">
+                <a:latin typeface="Helvetica Light" panose="020B0403020202020204" pitchFamily="34" charset="0"/>
+              </a:rPr>
+              <a:t> and execute commands one at a time.</a:t>
+            </a:r>
+          </a:p>
+        </p:txBody>
+      </p:sp>
+      <p:sp>
+        <p:nvSpPr>
+          <p:cNvPr id="7" name="TextBox 6">
+            <a:extLst>
+              <a:ext uri="{FF2B5EF4-FFF2-40B4-BE49-F238E27FC236}">
+                <a16:creationId xmlns:a16="http://schemas.microsoft.com/office/drawing/2014/main" id="{A2EF8AE9-67B1-24C1-82C4-4841F5F4CB1C}"/>
+              </a:ext>
+            </a:extLst>
+          </p:cNvPr>
+          <p:cNvSpPr txBox="1"/>
           <p:nvPr/>
-        </p:nvPicPr>
-        <p:blipFill rotWithShape="1">
-          <a:blip r:embed="rId2"/>
-          <a:srcRect r="30974"/>
-          <a:stretch/>
-        </p:blipFill>
+        </p:nvSpPr>
         <p:spPr>
           <a:xfrm>
-            <a:off x="775648" y="1051034"/>
-            <a:ext cx="4426974" cy="5436223"/>
+            <a:off x="2239701" y="2643883"/>
+            <a:ext cx="3856299" cy="446276"/>
           </a:xfrm>
           <a:prstGeom prst="rect">
             <a:avLst/>
           </a:prstGeom>
+          <a:solidFill>
+            <a:schemeClr val="bg1">
+              <a:lumMod val="85000"/>
+            </a:schemeClr>
+          </a:solidFill>
         </p:spPr>
-      </p:pic>
+        <p:txBody>
+          <a:bodyPr wrap="square">
+            <a:spAutoFit/>
+          </a:bodyPr>
+          <a:lstStyle/>
+          <a:p>
+            <a:pPr>
+              <a:buNone/>
+            </a:pPr>
+            <a:r>
+              <a:rPr lang="en-US" sz="2300" dirty="0">
+                <a:latin typeface="Courier New" panose="02070309020205020404" pitchFamily="49" charset="0"/>
+                <a:cs typeface="Courier New" panose="02070309020205020404" pitchFamily="49" charset="0"/>
+              </a:rPr>
+              <a:t>python3 </a:t>
+            </a:r>
+            <a:r>
+              <a:rPr lang="en-US" sz="2300" dirty="0" err="1">
+                <a:latin typeface="Courier New" panose="02070309020205020404" pitchFamily="49" charset="0"/>
+                <a:cs typeface="Courier New" panose="02070309020205020404" pitchFamily="49" charset="0"/>
+              </a:rPr>
+              <a:t>my_script.py</a:t>
+            </a:r>
+            <a:endParaRPr lang="en-US" sz="2300" dirty="0">
+              <a:latin typeface="Courier New" panose="02070309020205020404" pitchFamily="49" charset="0"/>
+              <a:cs typeface="Courier New" panose="02070309020205020404" pitchFamily="49" charset="0"/>
+            </a:endParaRPr>
+          </a:p>
+        </p:txBody>
+      </p:sp>
       <p:sp>
         <p:nvSpPr>
           <p:cNvPr id="9" name="TextBox 8">
             <a:extLst>
               <a:ext uri="{FF2B5EF4-FFF2-40B4-BE49-F238E27FC236}">
-                <a16:creationId xmlns:a16="http://schemas.microsoft.com/office/drawing/2014/main" id="{0AEB4600-4550-CB41-A5C9-110785544103}"/>
+                <a16:creationId xmlns:a16="http://schemas.microsoft.com/office/drawing/2014/main" id="{3069301B-431C-932D-D3CB-FF7FD1388F19}"/>
               </a:ext>
             </a:extLst>
           </p:cNvPr>
@@ -6352,8 +7514,91 @@
         </p:nvSpPr>
         <p:spPr>
           <a:xfrm>
-            <a:off x="5399633" y="3229556"/>
-            <a:ext cx="3179493" cy="2492990"/>
+            <a:off x="2239701" y="4296941"/>
+            <a:ext cx="3647752" cy="1154162"/>
+          </a:xfrm>
+          <a:prstGeom prst="rect">
+            <a:avLst/>
+          </a:prstGeom>
+          <a:solidFill>
+            <a:schemeClr val="bg1">
+              <a:lumMod val="85000"/>
+            </a:schemeClr>
+          </a:solidFill>
+        </p:spPr>
+        <p:txBody>
+          <a:bodyPr wrap="square">
+            <a:spAutoFit/>
+          </a:bodyPr>
+          <a:lstStyle/>
+          <a:p>
+            <a:pPr>
+              <a:buNone/>
+            </a:pPr>
+            <a:r>
+              <a:rPr lang="en-US" sz="2300" dirty="0">
+                <a:latin typeface="Courier New" panose="02070309020205020404" pitchFamily="49" charset="0"/>
+                <a:cs typeface="Courier New" panose="02070309020205020404" pitchFamily="49" charset="0"/>
+              </a:rPr>
+              <a:t>python3</a:t>
+            </a:r>
+          </a:p>
+          <a:p>
+            <a:pPr>
+              <a:buNone/>
+            </a:pPr>
+            <a:r>
+              <a:rPr lang="en-US" sz="2300" dirty="0">
+                <a:latin typeface="Courier New" panose="02070309020205020404" pitchFamily="49" charset="0"/>
+                <a:cs typeface="Courier New" panose="02070309020205020404" pitchFamily="49" charset="0"/>
+              </a:rPr>
+              <a:t>&gt;&gt;&gt; seq = "ATGCGTA"</a:t>
+            </a:r>
+          </a:p>
+          <a:p>
+            <a:pPr>
+              <a:buNone/>
+            </a:pPr>
+            <a:r>
+              <a:rPr lang="en-US" sz="2300" dirty="0">
+                <a:latin typeface="Courier New" panose="02070309020205020404" pitchFamily="49" charset="0"/>
+                <a:cs typeface="Courier New" panose="02070309020205020404" pitchFamily="49" charset="0"/>
+              </a:rPr>
+              <a:t>&gt;&gt;&gt; </a:t>
+            </a:r>
+            <a:r>
+              <a:rPr lang="en-US" sz="2300" dirty="0" err="1">
+                <a:latin typeface="Courier New" panose="02070309020205020404" pitchFamily="49" charset="0"/>
+                <a:cs typeface="Courier New" panose="02070309020205020404" pitchFamily="49" charset="0"/>
+              </a:rPr>
+              <a:t>len</a:t>
+            </a:r>
+            <a:r>
+              <a:rPr lang="en-US" sz="2300" dirty="0">
+                <a:latin typeface="Courier New" panose="02070309020205020404" pitchFamily="49" charset="0"/>
+                <a:cs typeface="Courier New" panose="02070309020205020404" pitchFamily="49" charset="0"/>
+              </a:rPr>
+              <a:t>(seq)</a:t>
+            </a:r>
+          </a:p>
+        </p:txBody>
+      </p:sp>
+      <p:sp>
+        <p:nvSpPr>
+          <p:cNvPr id="11" name="TextBox 10">
+            <a:extLst>
+              <a:ext uri="{FF2B5EF4-FFF2-40B4-BE49-F238E27FC236}">
+                <a16:creationId xmlns:a16="http://schemas.microsoft.com/office/drawing/2014/main" id="{F87588EF-8D18-CC89-4761-5F2B70ED32FC}"/>
+              </a:ext>
+            </a:extLst>
+          </p:cNvPr>
+          <p:cNvSpPr txBox="1"/>
+          <p:nvPr/>
+        </p:nvSpPr>
+        <p:spPr>
+          <a:xfrm>
+            <a:off x="748496" y="5560745"/>
+            <a:ext cx="10491537" cy="861774"/>
           </a:xfrm>
           <a:prstGeom prst="rect">
             <a:avLst/>
@@ -6361,28 +7606,38 @@
           <a:noFill/>
         </p:spPr>
         <p:txBody>
-          <a:bodyPr wrap="square" rtlCol="0">
+          <a:bodyPr wrap="square">
             <a:spAutoFit/>
           </a:bodyPr>
           <a:lstStyle/>
           <a:p>
-            <a:r>
+            <a:pPr>
+              <a:buNone/>
+            </a:pPr>
+            <a:r>
+              <a:rPr lang="en-US" sz="2600" b="1" dirty="0">
+                <a:latin typeface="HELVETICA LIGHT" panose="020B0403020202020204" pitchFamily="34" charset="0"/>
+              </a:rPr>
+              <a:t>3. Jupyter notebooks**</a:t>
+            </a:r>
+            <a:br>
               <a:rPr lang="en-US" sz="2600" dirty="0">
                 <a:latin typeface="Helvetica Light" panose="020B0403020202020204" pitchFamily="34" charset="0"/>
               </a:rPr>
-              <a:t>Functions dually as a terminal window and python interactive prompt, tab complete functionality</a:t>
-            </a:r>
-            <a:endParaRPr lang="en-US" sz="2600" dirty="0">
-              <a:latin typeface="Courier New" panose="02070309020205020404" pitchFamily="49" charset="0"/>
-              <a:cs typeface="Courier New" panose="02070309020205020404" pitchFamily="49" charset="0"/>
-            </a:endParaRPr>
+            </a:br>
+            <a:r>
+              <a:rPr lang="en-US" sz="2400" dirty="0">
+                <a:latin typeface="Helvetica Light" panose="020B0403020202020204" pitchFamily="34" charset="0"/>
+              </a:rPr>
+              <a:t>Run Python in code cells, with code, output, and explanatory text together.</a:t>
+            </a:r>
           </a:p>
         </p:txBody>
       </p:sp>
     </p:spTree>
     <p:extLst>
       <p:ext uri="{BB962C8B-B14F-4D97-AF65-F5344CB8AC3E}">
-        <p14:creationId xmlns:p14="http://schemas.microsoft.com/office/powerpoint/2010/main" val="3796788371"/>
+        <p14:creationId xmlns:p14="http://schemas.microsoft.com/office/powerpoint/2010/main" val="1913646152"/>
       </p:ext>
     </p:extLst>
   </p:cSld>
@@ -6441,51 +7696,76 @@
                 <a:latin typeface="Courier New" panose="02070309020205020404" pitchFamily="49" charset="0"/>
                 <a:cs typeface="Courier New" panose="02070309020205020404" pitchFamily="49" charset="0"/>
               </a:rPr>
-              <a:t>Team = "</a:t>
-            </a:r>
+              <a:t>team = "lakers"</a:t>
+            </a:r>
+          </a:p>
+          <a:p>
             <a:r>
               <a:rPr lang="en-US" sz="2500" dirty="0" err="1">
                 <a:latin typeface="Courier New" panose="02070309020205020404" pitchFamily="49" charset="0"/>
                 <a:cs typeface="Courier New" panose="02070309020205020404" pitchFamily="49" charset="0"/>
               </a:rPr>
-              <a:t>lakers</a:t>
+              <a:t>seq_one</a:t>
             </a:r>
             <a:r>
               <a:rPr lang="en-US" sz="2500" dirty="0">
                 <a:latin typeface="Courier New" panose="02070309020205020404" pitchFamily="49" charset="0"/>
                 <a:cs typeface="Courier New" panose="02070309020205020404" pitchFamily="49" charset="0"/>
               </a:rPr>
+              <a:t> = "</a:t>
+            </a:r>
+            <a:r>
+              <a:rPr lang="en-US" sz="2500" dirty="0" err="1">
+                <a:latin typeface="Courier New" panose="02070309020205020404" pitchFamily="49" charset="0"/>
+                <a:cs typeface="Courier New" panose="02070309020205020404" pitchFamily="49" charset="0"/>
+              </a:rPr>
+              <a:t>actgaaa</a:t>
+            </a:r>
+            <a:r>
+              <a:rPr lang="en-US" sz="2500" dirty="0">
+                <a:latin typeface="Courier New" panose="02070309020205020404" pitchFamily="49" charset="0"/>
+                <a:cs typeface="Courier New" panose="02070309020205020404" pitchFamily="49" charset="0"/>
+              </a:rPr>
               <a:t>"</a:t>
             </a:r>
           </a:p>
           <a:p>
             <a:r>
+              <a:rPr lang="en-US" sz="2500" dirty="0">
+                <a:latin typeface="Courier New" panose="02070309020205020404" pitchFamily="49" charset="0"/>
+                <a:cs typeface="Courier New" panose="02070309020205020404" pitchFamily="49" charset="0"/>
+              </a:rPr>
+              <a:t>seq3 = '</a:t>
+            </a:r>
+            <a:r>
               <a:rPr lang="en-US" sz="2500" dirty="0" err="1">
                 <a:latin typeface="Courier New" panose="02070309020205020404" pitchFamily="49" charset="0"/>
                 <a:cs typeface="Courier New" panose="02070309020205020404" pitchFamily="49" charset="0"/>
               </a:rPr>
-              <a:t>Seq_one</a:t>
+              <a:t>atcGGGC</a:t>
             </a:r>
             <a:r>
               <a:rPr lang="en-US" sz="2500" dirty="0">
                 <a:latin typeface="Courier New" panose="02070309020205020404" pitchFamily="49" charset="0"/>
                 <a:cs typeface="Courier New" panose="02070309020205020404" pitchFamily="49" charset="0"/>
               </a:rPr>
-              <a:t> = "</a:t>
-            </a:r>
+              <a:t>' # single or double quotes</a:t>
+            </a:r>
+          </a:p>
+          <a:p>
             <a:r>
               <a:rPr lang="en-US" sz="2500" dirty="0" err="1">
                 <a:latin typeface="Courier New" panose="02070309020205020404" pitchFamily="49" charset="0"/>
                 <a:cs typeface="Courier New" panose="02070309020205020404" pitchFamily="49" charset="0"/>
               </a:rPr>
-              <a:t>actgaaa</a:t>
+              <a:t>val</a:t>
             </a:r>
             <a:r>
               <a:rPr lang="en-US" sz="2500" dirty="0">
                 <a:latin typeface="Courier New" panose="02070309020205020404" pitchFamily="49" charset="0"/>
                 <a:cs typeface="Courier New" panose="02070309020205020404" pitchFamily="49" charset="0"/>
               </a:rPr>
-              <a:t>"</a:t>
+              <a:t> = '11.2' 	#something that looks like a float</a:t>
             </a:r>
           </a:p>
           <a:p>
@@ -6494,39 +7774,7 @@
                 <a:latin typeface="Courier New" panose="02070309020205020404" pitchFamily="49" charset="0"/>
                 <a:cs typeface="Courier New" panose="02070309020205020404" pitchFamily="49" charset="0"/>
               </a:rPr>
-              <a:t>Seq3 = '</a:t>
-            </a:r>
-            <a:r>
-              <a:rPr lang="en-US" sz="2500" dirty="0" err="1">
-                <a:latin typeface="Courier New" panose="02070309020205020404" pitchFamily="49" charset="0"/>
-                <a:cs typeface="Courier New" panose="02070309020205020404" pitchFamily="49" charset="0"/>
-              </a:rPr>
-              <a:t>atcGGGC</a:t>
-            </a:r>
-            <a:r>
-              <a:rPr lang="en-US" sz="2500" dirty="0">
-                <a:latin typeface="Courier New" panose="02070309020205020404" pitchFamily="49" charset="0"/>
-                <a:cs typeface="Courier New" panose="02070309020205020404" pitchFamily="49" charset="0"/>
-              </a:rPr>
-              <a:t>' # single or double quotes</a:t>
-            </a:r>
-          </a:p>
-          <a:p>
-            <a:r>
-              <a:rPr lang="en-US" sz="2500" dirty="0">
-                <a:latin typeface="Courier New" panose="02070309020205020404" pitchFamily="49" charset="0"/>
-                <a:cs typeface="Courier New" panose="02070309020205020404" pitchFamily="49" charset="0"/>
-              </a:rPr>
-              <a:t>Val = '11.2' 	#something that looks like a float</a:t>
-            </a:r>
-          </a:p>
-          <a:p>
-            <a:r>
-              <a:rPr lang="en-US" sz="2500" dirty="0">
-                <a:latin typeface="Courier New" panose="02070309020205020404" pitchFamily="49" charset="0"/>
-                <a:cs typeface="Courier New" panose="02070309020205020404" pitchFamily="49" charset="0"/>
-              </a:rPr>
-              <a:t>Sentence = "Joe Burrow is the real deal" </a:t>
+              <a:t>sentence = "Joe Burrow is the real deal" </a:t>
             </a:r>
           </a:p>
           <a:p>
@@ -6692,21 +7940,7 @@
                 <a:latin typeface="Courier New" panose="02070309020205020404" pitchFamily="49" charset="0"/>
                 <a:cs typeface="Courier New" panose="02070309020205020404" pitchFamily="49" charset="0"/>
               </a:rPr>
-              <a:t>Team = "</a:t>
-            </a:r>
-            <a:r>
-              <a:rPr lang="en-US" sz="2400" dirty="0" err="1">
-                <a:latin typeface="Courier New" panose="02070309020205020404" pitchFamily="49" charset="0"/>
-                <a:cs typeface="Courier New" panose="02070309020205020404" pitchFamily="49" charset="0"/>
-              </a:rPr>
-              <a:t>lakers</a:t>
-            </a:r>
-            <a:r>
-              <a:rPr lang="en-US" sz="2400" dirty="0">
-                <a:latin typeface="Courier New" panose="02070309020205020404" pitchFamily="49" charset="0"/>
-                <a:cs typeface="Courier New" panose="02070309020205020404" pitchFamily="49" charset="0"/>
-              </a:rPr>
-              <a:t>"</a:t>
+              <a:t>team = "lakers"</a:t>
             </a:r>
             <a:br>
               <a:rPr lang="en-US" sz="2400" dirty="0">
@@ -6719,7 +7953,7 @@
                 <a:latin typeface="Courier New" panose="02070309020205020404" pitchFamily="49" charset="0"/>
                 <a:cs typeface="Courier New" panose="02070309020205020404" pitchFamily="49" charset="0"/>
               </a:rPr>
-              <a:t>CapTeam</a:t>
+              <a:t>cap_team</a:t>
             </a:r>
             <a:r>
               <a:rPr lang="en-US" sz="2400" dirty="0">
@@ -6733,28 +7967,14 @@
                 <a:latin typeface="Courier New" panose="02070309020205020404" pitchFamily="49" charset="0"/>
                 <a:cs typeface="Courier New" panose="02070309020205020404" pitchFamily="49" charset="0"/>
               </a:rPr>
-              <a:t>Team.upper</a:t>
+              <a:t>team.upper</a:t>
             </a:r>
             <a:r>
               <a:rPr lang="en-US" sz="2400" dirty="0">
                 <a:latin typeface="Courier New" panose="02070309020205020404" pitchFamily="49" charset="0"/>
                 <a:cs typeface="Courier New" panose="02070309020205020404" pitchFamily="49" charset="0"/>
               </a:rPr>
-              <a:t>() #change </a:t>
-            </a:r>
-            <a:r>
-              <a:rPr lang="en-US" sz="2400" dirty="0" err="1">
-                <a:latin typeface="Courier New" panose="02070309020205020404" pitchFamily="49" charset="0"/>
-                <a:cs typeface="Courier New" panose="02070309020205020404" pitchFamily="49" charset="0"/>
-              </a:rPr>
-              <a:t>lakers</a:t>
-            </a:r>
-            <a:r>
-              <a:rPr lang="en-US" sz="2400" dirty="0">
-                <a:latin typeface="Courier New" panose="02070309020205020404" pitchFamily="49" charset="0"/>
-                <a:cs typeface="Courier New" panose="02070309020205020404" pitchFamily="49" charset="0"/>
-              </a:rPr>
-              <a:t> to LAKERS</a:t>
+              <a:t>() #change lakers to LAKERS</a:t>
             </a:r>
           </a:p>
           <a:p>
@@ -6775,7 +7995,7 @@
                 <a:latin typeface="Courier New" panose="02070309020205020404" pitchFamily="49" charset="0"/>
                 <a:cs typeface="Courier New" panose="02070309020205020404" pitchFamily="49" charset="0"/>
               </a:rPr>
-              <a:t>Seq_one</a:t>
+              <a:t>seq_one</a:t>
             </a:r>
             <a:r>
               <a:rPr lang="en-US" sz="2400" dirty="0">
@@ -6805,7 +8025,7 @@
                 <a:latin typeface="Courier New" panose="02070309020205020404" pitchFamily="49" charset="0"/>
                 <a:cs typeface="Courier New" panose="02070309020205020404" pitchFamily="49" charset="0"/>
               </a:rPr>
-              <a:t>NewSeq</a:t>
+              <a:t>new_seq</a:t>
             </a:r>
             <a:r>
               <a:rPr lang="en-US" sz="2400" dirty="0">
@@ -6819,7 +8039,7 @@
                 <a:latin typeface="Courier New" panose="02070309020205020404" pitchFamily="49" charset="0"/>
                 <a:cs typeface="Courier New" panose="02070309020205020404" pitchFamily="49" charset="0"/>
               </a:rPr>
-              <a:t>Seq_one.replace</a:t>
+              <a:t>seq_one.replace</a:t>
             </a:r>
             <a:r>
               <a:rPr lang="en-US" sz="2400" dirty="0">
@@ -6847,7 +8067,7 @@
                 <a:latin typeface="Courier New" panose="02070309020205020404" pitchFamily="49" charset="0"/>
                 <a:cs typeface="Courier New" panose="02070309020205020404" pitchFamily="49" charset="0"/>
               </a:rPr>
-              <a:t>NewSeq</a:t>
+              <a:t>new_seq</a:t>
             </a:r>
             <a:r>
               <a:rPr lang="en-US" sz="2400" dirty="0">
@@ -6861,7 +8081,7 @@
                 <a:latin typeface="Courier New" panose="02070309020205020404" pitchFamily="49" charset="0"/>
                 <a:cs typeface="Courier New" panose="02070309020205020404" pitchFamily="49" charset="0"/>
               </a:rPr>
-              <a:t>Seq_one.count</a:t>
+              <a:t>seq_one.count</a:t>
             </a:r>
             <a:r>
               <a:rPr lang="en-US" sz="2400" dirty="0">
@@ -6938,7 +8158,7 @@
         <p:spPr>
           <a:xfrm>
             <a:off x="3614530" y="1286721"/>
-            <a:ext cx="4365298" cy="523220"/>
+            <a:ext cx="4395755" cy="523220"/>
           </a:xfrm>
           <a:prstGeom prst="rect">
             <a:avLst/>
@@ -6955,7 +8175,7 @@
               <a:rPr lang="en-US" sz="2800" dirty="0" err="1">
                 <a:latin typeface="Helvetica Light" panose="020B0403020202020204" pitchFamily="34" charset="0"/>
               </a:rPr>
-              <a:t>StringName.</a:t>
+              <a:t>string_name.</a:t>
             </a:r>
             <a:r>
               <a:rPr lang="en-US" sz="2800" b="1" dirty="0" err="1">
@@ -7013,8 +8233,8 @@
         </p:nvSpPr>
         <p:spPr>
           <a:xfrm>
-            <a:off x="629478" y="2098933"/>
-            <a:ext cx="10485782" cy="4154984"/>
+            <a:off x="874170" y="2228671"/>
+            <a:ext cx="9846017" cy="2400657"/>
           </a:xfrm>
           <a:prstGeom prst="rect">
             <a:avLst/>
@@ -7027,200 +8247,100 @@
           <a:lstStyle/>
           <a:p>
             <a:r>
-              <a:rPr lang="en-US" sz="2400" dirty="0">
-                <a:latin typeface="Courier New" panose="02070309020205020404" pitchFamily="49" charset="0"/>
-                <a:cs typeface="Courier New" panose="02070309020205020404" pitchFamily="49" charset="0"/>
-              </a:rPr>
-              <a:t>Team = "lakers"</a:t>
-            </a:r>
-            <a:br>
-              <a:rPr lang="en-US" sz="2400" dirty="0">
-                <a:latin typeface="Courier New" panose="02070309020205020404" pitchFamily="49" charset="0"/>
-                <a:cs typeface="Courier New" panose="02070309020205020404" pitchFamily="49" charset="0"/>
-              </a:rPr>
-            </a:br>
-            <a:r>
-              <a:rPr lang="en-US" sz="2400" dirty="0" err="1">
-                <a:latin typeface="Courier New" panose="02070309020205020404" pitchFamily="49" charset="0"/>
-                <a:cs typeface="Courier New" panose="02070309020205020404" pitchFamily="49" charset="0"/>
-              </a:rPr>
-              <a:t>Team.isalpha</a:t>
-            </a:r>
-            <a:r>
-              <a:rPr lang="en-US" sz="2400" dirty="0">
-                <a:latin typeface="Courier New" panose="02070309020205020404" pitchFamily="49" charset="0"/>
-                <a:cs typeface="Courier New" panose="02070309020205020404" pitchFamily="49" charset="0"/>
-              </a:rPr>
-              <a:t>() #should return ’True’</a:t>
-            </a:r>
-          </a:p>
-          <a:p>
-            <a:endParaRPr lang="en-US" sz="2400" dirty="0">
-              <a:latin typeface="Courier New" panose="02070309020205020404" pitchFamily="49" charset="0"/>
-              <a:cs typeface="Courier New" panose="02070309020205020404" pitchFamily="49" charset="0"/>
-            </a:endParaRPr>
-          </a:p>
-          <a:p>
-            <a:endParaRPr lang="en-US" sz="2400" dirty="0">
-              <a:latin typeface="Courier New" panose="02070309020205020404" pitchFamily="49" charset="0"/>
-              <a:cs typeface="Courier New" panose="02070309020205020404" pitchFamily="49" charset="0"/>
-            </a:endParaRPr>
-          </a:p>
-          <a:p>
-            <a:r>
-              <a:rPr lang="en-US" sz="2400" dirty="0" err="1">
-                <a:latin typeface="Courier New" panose="02070309020205020404" pitchFamily="49" charset="0"/>
-                <a:cs typeface="Courier New" panose="02070309020205020404" pitchFamily="49" charset="0"/>
-              </a:rPr>
-              <a:t>Seq_one</a:t>
-            </a:r>
-            <a:r>
-              <a:rPr lang="en-US" sz="2400" dirty="0">
-                <a:latin typeface="Courier New" panose="02070309020205020404" pitchFamily="49" charset="0"/>
-                <a:cs typeface="Courier New" panose="02070309020205020404" pitchFamily="49" charset="0"/>
-              </a:rPr>
-              <a:t> = "</a:t>
-            </a:r>
-            <a:r>
-              <a:rPr lang="en-US" sz="2400" dirty="0" err="1">
-                <a:latin typeface="Courier New" panose="02070309020205020404" pitchFamily="49" charset="0"/>
-                <a:cs typeface="Courier New" panose="02070309020205020404" pitchFamily="49" charset="0"/>
-              </a:rPr>
-              <a:t>actgaaa</a:t>
-            </a:r>
-            <a:r>
-              <a:rPr lang="en-US" sz="2400" dirty="0">
-                <a:latin typeface="Courier New" panose="02070309020205020404" pitchFamily="49" charset="0"/>
-                <a:cs typeface="Courier New" panose="02070309020205020404" pitchFamily="49" charset="0"/>
-              </a:rPr>
-              <a:t>"</a:t>
-            </a:r>
-          </a:p>
-          <a:p>
-            <a:r>
-              <a:rPr lang="en-US" sz="2400" dirty="0" err="1">
-                <a:latin typeface="Courier New" panose="02070309020205020404" pitchFamily="49" charset="0"/>
-                <a:cs typeface="Courier New" panose="02070309020205020404" pitchFamily="49" charset="0"/>
-              </a:rPr>
-              <a:t>NewSeq</a:t>
-            </a:r>
-            <a:r>
-              <a:rPr lang="en-US" sz="2400" dirty="0">
-                <a:latin typeface="Courier New" panose="02070309020205020404" pitchFamily="49" charset="0"/>
-                <a:cs typeface="Courier New" panose="02070309020205020404" pitchFamily="49" charset="0"/>
-              </a:rPr>
-              <a:t> = </a:t>
-            </a:r>
-            <a:r>
-              <a:rPr lang="en-US" sz="2400" dirty="0" err="1">
-                <a:latin typeface="Courier New" panose="02070309020205020404" pitchFamily="49" charset="0"/>
-                <a:cs typeface="Courier New" panose="02070309020205020404" pitchFamily="49" charset="0"/>
-              </a:rPr>
-              <a:t>Seq_one.strip</a:t>
-            </a:r>
-            <a:r>
-              <a:rPr lang="en-US" sz="2400" dirty="0">
-                <a:latin typeface="Courier New" panose="02070309020205020404" pitchFamily="49" charset="0"/>
-                <a:cs typeface="Courier New" panose="02070309020205020404" pitchFamily="49" charset="0"/>
-              </a:rPr>
-              <a:t>(‘</a:t>
-            </a:r>
-            <a:r>
-              <a:rPr lang="en-US" sz="2400" dirty="0" err="1">
-                <a:latin typeface="Courier New" panose="02070309020205020404" pitchFamily="49" charset="0"/>
-                <a:cs typeface="Courier New" panose="02070309020205020404" pitchFamily="49" charset="0"/>
-              </a:rPr>
-              <a:t>aaa</a:t>
-            </a:r>
-            <a:r>
-              <a:rPr lang="en-US" sz="2400" dirty="0">
-                <a:latin typeface="Courier New" panose="02070309020205020404" pitchFamily="49" charset="0"/>
-                <a:cs typeface="Courier New" panose="02070309020205020404" pitchFamily="49" charset="0"/>
-              </a:rPr>
-              <a:t>')	# removes ‘</a:t>
-            </a:r>
-            <a:r>
-              <a:rPr lang="en-US" sz="2400" dirty="0" err="1">
-                <a:latin typeface="Courier New" panose="02070309020205020404" pitchFamily="49" charset="0"/>
-                <a:cs typeface="Courier New" panose="02070309020205020404" pitchFamily="49" charset="0"/>
-              </a:rPr>
-              <a:t>aaa</a:t>
-            </a:r>
-            <a:r>
-              <a:rPr lang="en-US" sz="2400" dirty="0">
-                <a:latin typeface="Courier New" panose="02070309020205020404" pitchFamily="49" charset="0"/>
-                <a:cs typeface="Courier New" panose="02070309020205020404" pitchFamily="49" charset="0"/>
-              </a:rPr>
-              <a:t>’</a:t>
-            </a:r>
-          </a:p>
-          <a:p>
-            <a:endParaRPr lang="en-US" sz="2400" dirty="0">
-              <a:latin typeface="Courier New" panose="02070309020205020404" pitchFamily="49" charset="0"/>
-              <a:cs typeface="Courier New" panose="02070309020205020404" pitchFamily="49" charset="0"/>
-            </a:endParaRPr>
-          </a:p>
-          <a:p>
-            <a:endParaRPr lang="en-US" sz="2400" dirty="0">
-              <a:latin typeface="Courier New" panose="02070309020205020404" pitchFamily="49" charset="0"/>
-              <a:cs typeface="Courier New" panose="02070309020205020404" pitchFamily="49" charset="0"/>
-            </a:endParaRPr>
-          </a:p>
-          <a:p>
-            <a:r>
-              <a:rPr lang="en-US" sz="2400" dirty="0" err="1">
-                <a:latin typeface="Courier New" panose="02070309020205020404" pitchFamily="49" charset="0"/>
-                <a:cs typeface="Courier New" panose="02070309020205020404" pitchFamily="49" charset="0"/>
-              </a:rPr>
-              <a:t>NewSeq</a:t>
-            </a:r>
-            <a:r>
-              <a:rPr lang="en-US" sz="2400" dirty="0">
-                <a:latin typeface="Courier New" panose="02070309020205020404" pitchFamily="49" charset="0"/>
-                <a:cs typeface="Courier New" panose="02070309020205020404" pitchFamily="49" charset="0"/>
-              </a:rPr>
-              <a:t> = </a:t>
-            </a:r>
-            <a:r>
-              <a:rPr lang="en-US" sz="2400" dirty="0" err="1">
-                <a:latin typeface="Courier New" panose="02070309020205020404" pitchFamily="49" charset="0"/>
-                <a:cs typeface="Courier New" panose="02070309020205020404" pitchFamily="49" charset="0"/>
-              </a:rPr>
-              <a:t>Seq_one.upper</a:t>
-            </a:r>
-            <a:r>
-              <a:rPr lang="en-US" sz="2400" dirty="0">
-                <a:latin typeface="Courier New" panose="02070309020205020404" pitchFamily="49" charset="0"/>
-                <a:cs typeface="Courier New" panose="02070309020205020404" pitchFamily="49" charset="0"/>
-              </a:rPr>
-              <a:t>() 	</a:t>
-            </a:r>
-          </a:p>
-          <a:p>
-            <a:r>
-              <a:rPr lang="en-US" sz="2400" dirty="0">
-                <a:latin typeface="Courier New" panose="02070309020205020404" pitchFamily="49" charset="0"/>
-                <a:cs typeface="Courier New" panose="02070309020205020404" pitchFamily="49" charset="0"/>
-              </a:rPr>
-              <a:t>Print(</a:t>
-            </a:r>
-            <a:r>
-              <a:rPr lang="en-US" sz="2400" dirty="0" err="1">
-                <a:latin typeface="Courier New" panose="02070309020205020404" pitchFamily="49" charset="0"/>
-                <a:cs typeface="Courier New" panose="02070309020205020404" pitchFamily="49" charset="0"/>
-              </a:rPr>
-              <a:t>NewSeq</a:t>
-            </a:r>
-            <a:r>
-              <a:rPr lang="en-US" sz="2400" dirty="0">
-                <a:latin typeface="Courier New" panose="02070309020205020404" pitchFamily="49" charset="0"/>
-                <a:cs typeface="Courier New" panose="02070309020205020404" pitchFamily="49" charset="0"/>
-              </a:rPr>
-              <a:t>)				# converts to caps</a:t>
-            </a:r>
-          </a:p>
-          <a:p>
-            <a:endParaRPr lang="en-US" sz="2400" dirty="0">
+              <a:rPr lang="en-US" sz="3000" dirty="0">
+                <a:latin typeface="Courier New" panose="02070309020205020404" pitchFamily="49" charset="0"/>
+                <a:cs typeface="Courier New" panose="02070309020205020404" pitchFamily="49" charset="0"/>
+              </a:rPr>
+              <a:t>seq = </a:t>
+            </a:r>
+            <a:r>
+              <a:rPr lang="en-US" sz="3000" dirty="0">
+                <a:solidFill>
+                  <a:srgbClr val="FF0000"/>
+                </a:solidFill>
+                <a:latin typeface="Courier New" panose="02070309020205020404" pitchFamily="49" charset="0"/>
+                <a:cs typeface="Courier New" panose="02070309020205020404" pitchFamily="49" charset="0"/>
+              </a:rPr>
+              <a:t>"  </a:t>
+            </a:r>
+            <a:r>
+              <a:rPr lang="en-US" sz="3000" dirty="0" err="1">
+                <a:solidFill>
+                  <a:srgbClr val="FF0000"/>
+                </a:solidFill>
+                <a:latin typeface="Courier New" panose="02070309020205020404" pitchFamily="49" charset="0"/>
+                <a:cs typeface="Courier New" panose="02070309020205020404" pitchFamily="49" charset="0"/>
+              </a:rPr>
+              <a:t>atgctagCGATCGGctaacggttATGC</a:t>
+            </a:r>
+            <a:r>
+              <a:rPr lang="en-US" sz="3000" dirty="0">
+                <a:solidFill>
+                  <a:srgbClr val="FF0000"/>
+                </a:solidFill>
+                <a:latin typeface="Courier New" panose="02070309020205020404" pitchFamily="49" charset="0"/>
+                <a:cs typeface="Courier New" panose="02070309020205020404" pitchFamily="49" charset="0"/>
+              </a:rPr>
+              <a:t>  \n"</a:t>
+            </a:r>
+          </a:p>
+          <a:p>
+            <a:r>
+              <a:rPr lang="en-US" sz="3000" dirty="0">
+                <a:latin typeface="Courier New" panose="02070309020205020404" pitchFamily="49" charset="0"/>
+                <a:cs typeface="Courier New" panose="02070309020205020404" pitchFamily="49" charset="0"/>
+              </a:rPr>
+              <a:t>seq = </a:t>
+            </a:r>
+            <a:r>
+              <a:rPr lang="en-US" sz="3000" dirty="0" err="1">
+                <a:latin typeface="Courier New" panose="02070309020205020404" pitchFamily="49" charset="0"/>
+                <a:cs typeface="Courier New" panose="02070309020205020404" pitchFamily="49" charset="0"/>
+              </a:rPr>
+              <a:t>seq.strip</a:t>
+            </a:r>
+            <a:r>
+              <a:rPr lang="en-US" sz="3000" dirty="0">
+                <a:latin typeface="Courier New" panose="02070309020205020404" pitchFamily="49" charset="0"/>
+                <a:cs typeface="Courier New" panose="02070309020205020404" pitchFamily="49" charset="0"/>
+              </a:rPr>
+              <a:t>()</a:t>
+            </a:r>
+          </a:p>
+          <a:p>
+            <a:r>
+              <a:rPr lang="en-US" sz="3000" dirty="0">
+                <a:latin typeface="Courier New" panose="02070309020205020404" pitchFamily="49" charset="0"/>
+                <a:cs typeface="Courier New" panose="02070309020205020404" pitchFamily="49" charset="0"/>
+              </a:rPr>
+              <a:t>seq = </a:t>
+            </a:r>
+            <a:r>
+              <a:rPr lang="en-US" sz="3000" dirty="0" err="1">
+                <a:latin typeface="Courier New" panose="02070309020205020404" pitchFamily="49" charset="0"/>
+                <a:cs typeface="Courier New" panose="02070309020205020404" pitchFamily="49" charset="0"/>
+              </a:rPr>
+              <a:t>seq.upper</a:t>
+            </a:r>
+            <a:r>
+              <a:rPr lang="en-US" sz="3000" dirty="0">
+                <a:latin typeface="Courier New" panose="02070309020205020404" pitchFamily="49" charset="0"/>
+                <a:cs typeface="Courier New" panose="02070309020205020404" pitchFamily="49" charset="0"/>
+              </a:rPr>
+              <a:t>()</a:t>
+            </a:r>
+          </a:p>
+          <a:p>
+            <a:r>
+              <a:rPr lang="en-US" sz="3000" dirty="0">
+                <a:latin typeface="Courier New" panose="02070309020205020404" pitchFamily="49" charset="0"/>
+                <a:cs typeface="Courier New" panose="02070309020205020404" pitchFamily="49" charset="0"/>
+              </a:rPr>
+              <a:t>print(seq)</a:t>
+            </a:r>
+          </a:p>
+          <a:p>
+            <a:endParaRPr lang="en-US" sz="3000" dirty="0">
               <a:effectLst/>
               <a:latin typeface="Courier New" panose="02070309020205020404" pitchFamily="49" charset="0"/>
               <a:cs typeface="Courier New" panose="02070309020205020404" pitchFamily="49" charset="0"/>
@@ -7305,6 +8425,86 @@
               </a:rPr>
               <a:t>functionname</a:t>
             </a:r>
+            <a:endParaRPr lang="en-US" sz="2800" b="1" dirty="0">
+              <a:latin typeface="Helvetica Light" panose="020B0403020202020204" pitchFamily="34" charset="0"/>
+            </a:endParaRPr>
+          </a:p>
+        </p:txBody>
+      </p:sp>
+      <p:sp>
+        <p:nvSpPr>
+          <p:cNvPr id="5" name="TextBox 4">
+            <a:extLst>
+              <a:ext uri="{FF2B5EF4-FFF2-40B4-BE49-F238E27FC236}">
+                <a16:creationId xmlns:a16="http://schemas.microsoft.com/office/drawing/2014/main" id="{7859F22E-3FE7-4F94-C711-C4F57E11A9F6}"/>
+              </a:ext>
+            </a:extLst>
+          </p:cNvPr>
+          <p:cNvSpPr txBox="1"/>
+          <p:nvPr/>
+        </p:nvSpPr>
+        <p:spPr>
+          <a:xfrm>
+            <a:off x="874170" y="4431886"/>
+            <a:ext cx="10366164" cy="2277547"/>
+          </a:xfrm>
+          <a:prstGeom prst="rect">
+            <a:avLst/>
+          </a:prstGeom>
+          <a:noFill/>
+        </p:spPr>
+        <p:txBody>
+          <a:bodyPr wrap="square" rtlCol="0">
+            <a:spAutoFit/>
+          </a:bodyPr>
+          <a:lstStyle/>
+          <a:p>
+            <a:r>
+              <a:rPr lang="en-US" sz="2800" dirty="0">
+                <a:latin typeface="Helvetica Light" panose="020B0403020202020204" pitchFamily="34" charset="0"/>
+              </a:rPr>
+              <a:t>.strip() strips specified character(s) from string. Default will strip whitespace. Commonly used to strip line endings:</a:t>
+            </a:r>
+          </a:p>
+          <a:p>
+            <a:endParaRPr lang="en-US" sz="2800" b="1" dirty="0">
+              <a:latin typeface="Helvetica Light" panose="020B0403020202020204" pitchFamily="34" charset="0"/>
+            </a:endParaRPr>
+          </a:p>
+          <a:p>
+            <a:r>
+              <a:rPr lang="en-US" sz="2800" dirty="0">
+                <a:latin typeface="Courier New" panose="02070309020205020404" pitchFamily="49" charset="0"/>
+                <a:cs typeface="Courier New" panose="02070309020205020404" pitchFamily="49" charset="0"/>
+              </a:rPr>
+              <a:t>seq = </a:t>
+            </a:r>
+            <a:r>
+              <a:rPr lang="en-US" sz="2800" dirty="0" err="1">
+                <a:latin typeface="Courier New" panose="02070309020205020404" pitchFamily="49" charset="0"/>
+                <a:cs typeface="Courier New" panose="02070309020205020404" pitchFamily="49" charset="0"/>
+              </a:rPr>
+              <a:t>seq.strip</a:t>
+            </a:r>
+            <a:r>
+              <a:rPr lang="en-US" sz="2800" dirty="0">
+                <a:solidFill>
+                  <a:srgbClr val="FF0000"/>
+                </a:solidFill>
+                <a:latin typeface="Courier New" panose="02070309020205020404" pitchFamily="49" charset="0"/>
+                <a:cs typeface="Courier New" panose="02070309020205020404" pitchFamily="49" charset="0"/>
+              </a:rPr>
+              <a:t>("\n"</a:t>
+            </a:r>
+            <a:r>
+              <a:rPr lang="en-US" sz="2800" dirty="0">
+                <a:latin typeface="Courier New" panose="02070309020205020404" pitchFamily="49" charset="0"/>
+                <a:cs typeface="Courier New" panose="02070309020205020404" pitchFamily="49" charset="0"/>
+              </a:rPr>
+              <a:t>)</a:t>
+            </a:r>
+          </a:p>
+          <a:p>
             <a:endParaRPr lang="en-US" sz="2800" b="1" dirty="0">
               <a:latin typeface="Helvetica Light" panose="020B0403020202020204" pitchFamily="34" charset="0"/>
             </a:endParaRPr>
@@ -7329,6 +8529,307 @@
   <p:cSld>
     <p:spTree>
       <p:nvGrpSpPr>
+        <p:cNvPr id="1" name="">
+          <a:extLst>
+            <a:ext uri="{FF2B5EF4-FFF2-40B4-BE49-F238E27FC236}">
+              <a16:creationId xmlns:a16="http://schemas.microsoft.com/office/drawing/2014/main" id="{77178F9A-FA44-C77D-FBAB-2D20AA8728EE}"/>
+            </a:ext>
+          </a:extLst>
+        </p:cNvPr>
+        <p:cNvGrpSpPr/>
+        <p:nvPr/>
+      </p:nvGrpSpPr>
+      <p:grpSpPr>
+        <a:xfrm>
+          <a:off x="0" y="0"/>
+          <a:ext cx="0" cy="0"/>
+          <a:chOff x="0" y="0"/>
+          <a:chExt cx="0" cy="0"/>
+        </a:xfrm>
+      </p:grpSpPr>
+      <p:sp>
+        <p:nvSpPr>
+          <p:cNvPr id="2" name="Rectangle 1">
+            <a:extLst>
+              <a:ext uri="{FF2B5EF4-FFF2-40B4-BE49-F238E27FC236}">
+                <a16:creationId xmlns:a16="http://schemas.microsoft.com/office/drawing/2014/main" id="{9005BB7E-AF8F-4DA3-BE41-110DC50E0E8E}"/>
+              </a:ext>
+            </a:extLst>
+          </p:cNvPr>
+          <p:cNvSpPr/>
+          <p:nvPr/>
+        </p:nvSpPr>
+        <p:spPr>
+          <a:xfrm>
+            <a:off x="949360" y="2228671"/>
+            <a:ext cx="9846017" cy="1508105"/>
+          </a:xfrm>
+          <a:prstGeom prst="rect">
+            <a:avLst/>
+          </a:prstGeom>
+        </p:spPr>
+        <p:txBody>
+          <a:bodyPr wrap="square">
+            <a:spAutoFit/>
+          </a:bodyPr>
+          <a:lstStyle/>
+          <a:p>
+            <a:r>
+              <a:rPr lang="en-US" sz="3200" dirty="0">
+                <a:latin typeface="Courier New" panose="02070309020205020404" pitchFamily="49" charset="0"/>
+                <a:cs typeface="Courier New" panose="02070309020205020404" pitchFamily="49" charset="0"/>
+              </a:rPr>
+              <a:t>data = </a:t>
+            </a:r>
+            <a:r>
+              <a:rPr lang="en-US" sz="3200" dirty="0">
+                <a:solidFill>
+                  <a:srgbClr val="FF0000"/>
+                </a:solidFill>
+                <a:latin typeface="Courier New" panose="02070309020205020404" pitchFamily="49" charset="0"/>
+                <a:cs typeface="Courier New" panose="02070309020205020404" pitchFamily="49" charset="0"/>
+              </a:rPr>
+              <a:t>"wolf,12,24.5,Nevada"</a:t>
+            </a:r>
+          </a:p>
+          <a:p>
+            <a:r>
+              <a:rPr lang="en-US" sz="3000" dirty="0">
+                <a:latin typeface="Courier New" panose="02070309020205020404" pitchFamily="49" charset="0"/>
+                <a:cs typeface="Courier New" panose="02070309020205020404" pitchFamily="49" charset="0"/>
+              </a:rPr>
+              <a:t>fields = </a:t>
+            </a:r>
+            <a:r>
+              <a:rPr lang="en-US" sz="3000" dirty="0" err="1">
+                <a:latin typeface="Courier New" panose="02070309020205020404" pitchFamily="49" charset="0"/>
+                <a:cs typeface="Courier New" panose="02070309020205020404" pitchFamily="49" charset="0"/>
+              </a:rPr>
+              <a:t>data.split</a:t>
+            </a:r>
+            <a:r>
+              <a:rPr lang="en-US" sz="3000" dirty="0">
+                <a:latin typeface="Courier New" panose="02070309020205020404" pitchFamily="49" charset="0"/>
+                <a:cs typeface="Courier New" panose="02070309020205020404" pitchFamily="49" charset="0"/>
+              </a:rPr>
+              <a:t>(</a:t>
+            </a:r>
+            <a:r>
+              <a:rPr lang="en-US" sz="2800" dirty="0">
+                <a:solidFill>
+                  <a:srgbClr val="FF0000"/>
+                </a:solidFill>
+                <a:latin typeface="Courier New" panose="02070309020205020404" pitchFamily="49" charset="0"/>
+                <a:cs typeface="Courier New" panose="02070309020205020404" pitchFamily="49" charset="0"/>
+              </a:rPr>
+              <a:t>"</a:t>
+            </a:r>
+            <a:r>
+              <a:rPr lang="en-US" sz="3000" dirty="0">
+                <a:solidFill>
+                  <a:srgbClr val="FF0000"/>
+                </a:solidFill>
+                <a:latin typeface="Courier New" panose="02070309020205020404" pitchFamily="49" charset="0"/>
+                <a:cs typeface="Courier New" panose="02070309020205020404" pitchFamily="49" charset="0"/>
+              </a:rPr>
+              <a:t>,</a:t>
+            </a:r>
+            <a:r>
+              <a:rPr lang="en-US" sz="2800" dirty="0">
+                <a:solidFill>
+                  <a:srgbClr val="FF0000"/>
+                </a:solidFill>
+                <a:latin typeface="Courier New" panose="02070309020205020404" pitchFamily="49" charset="0"/>
+                <a:cs typeface="Courier New" panose="02070309020205020404" pitchFamily="49" charset="0"/>
+              </a:rPr>
+              <a:t>”)</a:t>
+            </a:r>
+          </a:p>
+          <a:p>
+            <a:r>
+              <a:rPr lang="en-US" sz="2800" dirty="0">
+                <a:latin typeface="Courier New" panose="02070309020205020404" pitchFamily="49" charset="0"/>
+                <a:cs typeface="Courier New" panose="02070309020205020404" pitchFamily="49" charset="0"/>
+              </a:rPr>
+              <a:t>p</a:t>
+            </a:r>
+            <a:r>
+              <a:rPr lang="en-US" sz="2800" dirty="0">
+                <a:effectLst/>
+                <a:latin typeface="Courier New" panose="02070309020205020404" pitchFamily="49" charset="0"/>
+                <a:cs typeface="Courier New" panose="02070309020205020404" pitchFamily="49" charset="0"/>
+              </a:rPr>
+              <a:t>rint(</a:t>
+            </a:r>
+            <a:r>
+              <a:rPr lang="en-US" sz="3000" dirty="0">
+                <a:effectLst/>
+                <a:latin typeface="Courier New" panose="02070309020205020404" pitchFamily="49" charset="0"/>
+                <a:cs typeface="Courier New" panose="02070309020205020404" pitchFamily="49" charset="0"/>
+              </a:rPr>
+              <a:t>fields</a:t>
+            </a:r>
+            <a:r>
+              <a:rPr lang="en-US" sz="2800" dirty="0">
+                <a:effectLst/>
+                <a:latin typeface="Courier New" panose="02070309020205020404" pitchFamily="49" charset="0"/>
+                <a:cs typeface="Courier New" panose="02070309020205020404" pitchFamily="49" charset="0"/>
+              </a:rPr>
+              <a:t>)</a:t>
+            </a:r>
+            <a:endParaRPr lang="en-US" sz="3000" dirty="0">
+              <a:effectLst/>
+              <a:latin typeface="Courier New" panose="02070309020205020404" pitchFamily="49" charset="0"/>
+              <a:cs typeface="Courier New" panose="02070309020205020404" pitchFamily="49" charset="0"/>
+            </a:endParaRPr>
+          </a:p>
+        </p:txBody>
+      </p:sp>
+      <p:sp>
+        <p:nvSpPr>
+          <p:cNvPr id="3" name="TextBox 2">
+            <a:extLst>
+              <a:ext uri="{FF2B5EF4-FFF2-40B4-BE49-F238E27FC236}">
+                <a16:creationId xmlns:a16="http://schemas.microsoft.com/office/drawing/2014/main" id="{0A90E736-9B3A-0F45-1901-886656F69818}"/>
+              </a:ext>
+            </a:extLst>
+          </p:cNvPr>
+          <p:cNvSpPr txBox="1"/>
+          <p:nvPr/>
+        </p:nvSpPr>
+        <p:spPr>
+          <a:xfrm>
+            <a:off x="1934432" y="397565"/>
+            <a:ext cx="7875874" cy="600164"/>
+          </a:xfrm>
+          <a:prstGeom prst="rect">
+            <a:avLst/>
+          </a:prstGeom>
+          <a:noFill/>
+        </p:spPr>
+        <p:txBody>
+          <a:bodyPr wrap="none" rtlCol="0">
+            <a:spAutoFit/>
+          </a:bodyPr>
+          <a:lstStyle/>
+          <a:p>
+            <a:r>
+              <a:rPr lang="en-US" sz="3300" b="1" dirty="0">
+                <a:latin typeface="Helvetica Light" panose="020B0403020202020204" pitchFamily="34" charset="0"/>
+              </a:rPr>
+              <a:t>Scalars: built in string functions/methods</a:t>
+            </a:r>
+          </a:p>
+        </p:txBody>
+      </p:sp>
+      <p:sp>
+        <p:nvSpPr>
+          <p:cNvPr id="4" name="TextBox 3">
+            <a:extLst>
+              <a:ext uri="{FF2B5EF4-FFF2-40B4-BE49-F238E27FC236}">
+                <a16:creationId xmlns:a16="http://schemas.microsoft.com/office/drawing/2014/main" id="{1BFC8846-8B05-DCC4-F2D2-0BD171DFF340}"/>
+              </a:ext>
+            </a:extLst>
+          </p:cNvPr>
+          <p:cNvSpPr txBox="1"/>
+          <p:nvPr/>
+        </p:nvSpPr>
+        <p:spPr>
+          <a:xfrm>
+            <a:off x="3045345" y="1089980"/>
+            <a:ext cx="7338869" cy="523220"/>
+          </a:xfrm>
+          <a:prstGeom prst="rect">
+            <a:avLst/>
+          </a:prstGeom>
+          <a:noFill/>
+        </p:spPr>
+        <p:txBody>
+          <a:bodyPr wrap="none" rtlCol="0">
+            <a:spAutoFit/>
+          </a:bodyPr>
+          <a:lstStyle/>
+          <a:p>
+            <a:r>
+              <a:rPr lang="en-US" sz="2800" dirty="0">
+                <a:latin typeface="Helvetica Light" panose="020B0403020202020204" pitchFamily="34" charset="0"/>
+              </a:rPr>
+              <a:t>Turning Strings into data (or lists) with .split()</a:t>
+            </a:r>
+          </a:p>
+        </p:txBody>
+      </p:sp>
+      <p:sp>
+        <p:nvSpPr>
+          <p:cNvPr id="6" name="Rectangle 5">
+            <a:extLst>
+              <a:ext uri="{FF2B5EF4-FFF2-40B4-BE49-F238E27FC236}">
+                <a16:creationId xmlns:a16="http://schemas.microsoft.com/office/drawing/2014/main" id="{D38DE882-917E-06DA-16D9-04AA419D3963}"/>
+              </a:ext>
+            </a:extLst>
+          </p:cNvPr>
+          <p:cNvSpPr/>
+          <p:nvPr/>
+        </p:nvSpPr>
+        <p:spPr>
+          <a:xfrm>
+            <a:off x="949360" y="4033408"/>
+            <a:ext cx="9846017" cy="2062103"/>
+          </a:xfrm>
+          <a:prstGeom prst="rect">
+            <a:avLst/>
+          </a:prstGeom>
+        </p:spPr>
+        <p:txBody>
+          <a:bodyPr wrap="square">
+            <a:spAutoFit/>
+          </a:bodyPr>
+          <a:lstStyle/>
+          <a:p>
+            <a:r>
+              <a:rPr lang="en-US" sz="3200" dirty="0">
+                <a:latin typeface="Helvetica Light" panose="020B0403020202020204" pitchFamily="34" charset="0"/>
+                <a:cs typeface="Courier New" panose="02070309020205020404" pitchFamily="49" charset="0"/>
+              </a:rPr>
+              <a:t>The above will return a list, which can then be controlled in a loop:</a:t>
+            </a:r>
+          </a:p>
+          <a:p>
+            <a:endParaRPr lang="en-US" sz="3200" dirty="0">
+              <a:effectLst/>
+              <a:latin typeface="Courier New" panose="02070309020205020404" pitchFamily="49" charset="0"/>
+              <a:cs typeface="Courier New" panose="02070309020205020404" pitchFamily="49" charset="0"/>
+            </a:endParaRPr>
+          </a:p>
+          <a:p>
+            <a:r>
+              <a:rPr lang="en-US" sz="3200" dirty="0">
+                <a:latin typeface="Courier New" panose="02070309020205020404" pitchFamily="49" charset="0"/>
+                <a:cs typeface="Courier New" panose="02070309020205020404" pitchFamily="49" charset="0"/>
+              </a:rPr>
+              <a:t>['wolf', '12', '24.5', 'Nevada']</a:t>
+            </a:r>
+          </a:p>
+        </p:txBody>
+      </p:sp>
+    </p:spTree>
+    <p:extLst>
+      <p:ext uri="{BB962C8B-B14F-4D97-AF65-F5344CB8AC3E}">
+        <p14:creationId xmlns:p14="http://schemas.microsoft.com/office/powerpoint/2010/main" val="1862610827"/>
+      </p:ext>
+    </p:extLst>
+  </p:cSld>
+  <p:clrMapOvr>
+    <a:masterClrMapping/>
+  </p:clrMapOvr>
+</p:sld>
+</file>
+
+<file path=ppt/slides/slide9.xml><?xml version="1.0" encoding="utf-8"?>
+<p:sld xmlns:a="http://schemas.openxmlformats.org/drawingml/2006/main" xmlns:r="http://schemas.openxmlformats.org/officeDocument/2006/relationships" xmlns:p="http://schemas.openxmlformats.org/presentationml/2006/main">
+  <p:cSld>
+    <p:spTree>
+      <p:nvGrpSpPr>
         <p:cNvPr id="1" name=""/>
         <p:cNvGrpSpPr/>
         <p:nvPr/>
@@ -7436,7 +8937,7 @@
         <p:spPr>
           <a:xfrm>
             <a:off x="911326" y="2487595"/>
-            <a:ext cx="9288120" cy="892552"/>
+            <a:ext cx="11370420" cy="1292662"/>
           </a:xfrm>
           <a:prstGeom prst="rect">
             <a:avLst/>
@@ -7454,7 +8955,7 @@
                 <a:latin typeface="Courier New" panose="02070309020205020404" pitchFamily="49" charset="0"/>
                 <a:cs typeface="Courier New" panose="02070309020205020404" pitchFamily="49" charset="0"/>
               </a:rPr>
-              <a:t>Dig1 = 13		# no quotes for integers</a:t>
+              <a:t>dig1 = 13		# no quotes for integers</a:t>
             </a:r>
           </a:p>
           <a:p>
@@ -7463,7 +8964,16 @@
                 <a:latin typeface="Courier New" panose="02070309020205020404" pitchFamily="49" charset="0"/>
                 <a:cs typeface="Courier New" panose="02070309020205020404" pitchFamily="49" charset="0"/>
               </a:rPr>
-              <a:t>Dig2 = '111'		# quotes make this a string</a:t>
+              <a:t>dig2 = '111'		# quotes make this a string</a:t>
+            </a:r>
+          </a:p>
+          <a:p>
+            <a:r>
+              <a:rPr lang="en-US" sz="2600" dirty="0">
+                <a:latin typeface="Courier New" panose="02070309020205020404" pitchFamily="49" charset="0"/>
+                <a:cs typeface="Courier New" panose="02070309020205020404" pitchFamily="49" charset="0"/>
+              </a:rPr>
+              <a:t>type(dig2)	# will return var type, float in this case</a:t>
             </a:r>
           </a:p>
         </p:txBody>
@@ -7483,7 +8993,7 @@
         <p:spPr>
           <a:xfrm>
             <a:off x="921264" y="4051855"/>
-            <a:ext cx="10836621" cy="523220"/>
+            <a:ext cx="10459915" cy="523220"/>
           </a:xfrm>
           <a:prstGeom prst="rect">
             <a:avLst/>
@@ -7506,7 +9016,7 @@
               <a:rPr lang="en-US" sz="2800" dirty="0">
                 <a:latin typeface="Helvetica Light" panose="020B0403020202020204" pitchFamily="34" charset="0"/>
               </a:rPr>
-              <a:t>: ' floating’ decimal point (all is means is there is a decimal)</a:t>
+              <a:t>: ' floating’ decimal point (simply means there is a decimal)</a:t>
             </a:r>
           </a:p>
         </p:txBody>
@@ -7526,7 +9036,7 @@
         <p:spPr>
           <a:xfrm>
             <a:off x="884334" y="4802357"/>
-            <a:ext cx="9288120" cy="1292662"/>
+            <a:ext cx="10690747" cy="1292662"/>
           </a:xfrm>
           <a:prstGeom prst="rect">
             <a:avLst/>
@@ -7562,7 +9072,7 @@
                 <a:latin typeface="Courier New" panose="02070309020205020404" pitchFamily="49" charset="0"/>
                 <a:cs typeface="Courier New" panose="02070309020205020404" pitchFamily="49" charset="0"/>
               </a:rPr>
-              <a:t>F3 = float(F2)</a:t>
+              <a:t>F3 = float(F2)	# float function converts to float</a:t>
             </a:r>
           </a:p>
         </p:txBody>
@@ -7683,421 +9193,6 @@
       <p:bldP spid="6" grpId="0"/>
     </p:bldLst>
   </p:timing>
-</p:sld>
-</file>
-
-<file path=ppt/slides/slide9.xml><?xml version="1.0" encoding="utf-8"?>
-<p:sld xmlns:a="http://schemas.openxmlformats.org/drawingml/2006/main" xmlns:r="http://schemas.openxmlformats.org/officeDocument/2006/relationships" xmlns:p="http://schemas.openxmlformats.org/presentationml/2006/main">
-  <p:cSld>
-    <p:spTree>
-      <p:nvGrpSpPr>
-        <p:cNvPr id="1" name=""/>
-        <p:cNvGrpSpPr/>
-        <p:nvPr/>
-      </p:nvGrpSpPr>
-      <p:grpSpPr>
-        <a:xfrm>
-          <a:off x="0" y="0"/>
-          <a:ext cx="0" cy="0"/>
-          <a:chOff x="0" y="0"/>
-          <a:chExt cx="0" cy="0"/>
-        </a:xfrm>
-      </p:grpSpPr>
-      <p:sp>
-        <p:nvSpPr>
-          <p:cNvPr id="2" name="Rectangle 1">
-            <a:extLst>
-              <a:ext uri="{FF2B5EF4-FFF2-40B4-BE49-F238E27FC236}">
-                <a16:creationId xmlns:a16="http://schemas.microsoft.com/office/drawing/2014/main" id="{75B6E8E4-FEE0-6748-A507-33295519B353}"/>
-              </a:ext>
-            </a:extLst>
-          </p:cNvPr>
-          <p:cNvSpPr/>
-          <p:nvPr/>
-        </p:nvSpPr>
-        <p:spPr>
-          <a:xfrm>
-            <a:off x="2367169" y="1409878"/>
-            <a:ext cx="6813853" cy="446276"/>
-          </a:xfrm>
-          <a:prstGeom prst="rect">
-            <a:avLst/>
-          </a:prstGeom>
-        </p:spPr>
-        <p:txBody>
-          <a:bodyPr wrap="none">
-            <a:spAutoFit/>
-          </a:bodyPr>
-          <a:lstStyle/>
-          <a:p>
-            <a:r>
-              <a:rPr lang="en-US" sz="2300" dirty="0">
-                <a:latin typeface="Courier New" panose="02070309020205020404" pitchFamily="49" charset="0"/>
-                <a:ea typeface="Courier New" panose="02070309020205020404" pitchFamily="49" charset="0"/>
-                <a:cs typeface="Courier New" panose="02070309020205020404" pitchFamily="49" charset="0"/>
-              </a:rPr>
-              <a:t>%d</a:t>
-            </a:r>
-            <a:r>
-              <a:rPr lang="en-US" sz="2300" dirty="0">
-                <a:latin typeface="Courier New" panose="02070309020205020404" pitchFamily="49" charset="0"/>
-                <a:ea typeface="Times New Roman" panose="02020603050405020304" pitchFamily="18" charset="0"/>
-                <a:cs typeface="Courier New" panose="02070309020205020404" pitchFamily="49" charset="0"/>
-              </a:rPr>
-              <a:t> </a:t>
-            </a:r>
-            <a:r>
-              <a:rPr lang="en-US" sz="2300" dirty="0">
-                <a:latin typeface="+mj-lt"/>
-                <a:ea typeface="Times New Roman" panose="02020603050405020304" pitchFamily="18" charset="0"/>
-              </a:rPr>
-              <a:t>for an integer, </a:t>
-            </a:r>
-            <a:r>
-              <a:rPr lang="en-US" sz="2300" dirty="0">
-                <a:latin typeface="Courier New" panose="02070309020205020404" pitchFamily="49" charset="0"/>
-                <a:ea typeface="Courier New" panose="02070309020205020404" pitchFamily="49" charset="0"/>
-                <a:cs typeface="Courier New" panose="02070309020205020404" pitchFamily="49" charset="0"/>
-              </a:rPr>
-              <a:t>%f</a:t>
-            </a:r>
-            <a:r>
-              <a:rPr lang="en-US" sz="2300" dirty="0">
-                <a:latin typeface="Courier New" panose="02070309020205020404" pitchFamily="49" charset="0"/>
-                <a:ea typeface="Times New Roman" panose="02020603050405020304" pitchFamily="18" charset="0"/>
-                <a:cs typeface="Courier New" panose="02070309020205020404" pitchFamily="49" charset="0"/>
-              </a:rPr>
-              <a:t> </a:t>
-            </a:r>
-            <a:r>
-              <a:rPr lang="en-US" sz="2300" dirty="0">
-                <a:latin typeface="+mj-lt"/>
-                <a:ea typeface="Times New Roman" panose="02020603050405020304" pitchFamily="18" charset="0"/>
-              </a:rPr>
-              <a:t>for a float, and</a:t>
-            </a:r>
-            <a:r>
-              <a:rPr lang="en-US" sz="2300" dirty="0">
-                <a:latin typeface="Courier New" panose="02070309020205020404" pitchFamily="49" charset="0"/>
-                <a:ea typeface="Times New Roman" panose="02020603050405020304" pitchFamily="18" charset="0"/>
-                <a:cs typeface="Courier New" panose="02070309020205020404" pitchFamily="49" charset="0"/>
-              </a:rPr>
-              <a:t> </a:t>
-            </a:r>
-            <a:r>
-              <a:rPr lang="en-US" sz="2300" dirty="0">
-                <a:latin typeface="Courier New" panose="02070309020205020404" pitchFamily="49" charset="0"/>
-                <a:ea typeface="Courier New" panose="02070309020205020404" pitchFamily="49" charset="0"/>
-                <a:cs typeface="Courier New" panose="02070309020205020404" pitchFamily="49" charset="0"/>
-              </a:rPr>
-              <a:t>%s</a:t>
-            </a:r>
-            <a:r>
-              <a:rPr lang="en-US" sz="2300" dirty="0">
-                <a:latin typeface="Courier New" panose="02070309020205020404" pitchFamily="49" charset="0"/>
-                <a:ea typeface="Times New Roman" panose="02020603050405020304" pitchFamily="18" charset="0"/>
-                <a:cs typeface="Courier New" panose="02070309020205020404" pitchFamily="49" charset="0"/>
-              </a:rPr>
-              <a:t> </a:t>
-            </a:r>
-            <a:r>
-              <a:rPr lang="en-US" sz="2300" dirty="0">
-                <a:latin typeface="+mj-lt"/>
-                <a:ea typeface="Times New Roman" panose="02020603050405020304" pitchFamily="18" charset="0"/>
-              </a:rPr>
-              <a:t>for a string. </a:t>
-            </a:r>
-            <a:endParaRPr lang="en-US" sz="2300" dirty="0">
-              <a:latin typeface="+mj-lt"/>
-            </a:endParaRPr>
-          </a:p>
-        </p:txBody>
-      </p:sp>
-      <p:sp>
-        <p:nvSpPr>
-          <p:cNvPr id="3" name="TextBox 2">
-            <a:extLst>
-              <a:ext uri="{FF2B5EF4-FFF2-40B4-BE49-F238E27FC236}">
-                <a16:creationId xmlns:a16="http://schemas.microsoft.com/office/drawing/2014/main" id="{623CF459-0F89-D345-AA63-7A331BEB4ACC}"/>
-              </a:ext>
-            </a:extLst>
-          </p:cNvPr>
-          <p:cNvSpPr txBox="1"/>
-          <p:nvPr/>
-        </p:nvSpPr>
-        <p:spPr>
-          <a:xfrm>
-            <a:off x="1752950" y="327991"/>
-            <a:ext cx="7800533" cy="1031051"/>
-          </a:xfrm>
-          <a:prstGeom prst="rect">
-            <a:avLst/>
-          </a:prstGeom>
-          <a:noFill/>
-        </p:spPr>
-        <p:txBody>
-          <a:bodyPr wrap="none" rtlCol="0">
-            <a:spAutoFit/>
-          </a:bodyPr>
-          <a:lstStyle/>
-          <a:p>
-            <a:pPr algn="ctr"/>
-            <a:r>
-              <a:rPr lang="en-US" sz="3300" b="1" dirty="0">
-                <a:latin typeface="Helvetica Light" panose="020B0403020202020204" pitchFamily="34" charset="0"/>
-              </a:rPr>
-              <a:t>% operator: </a:t>
-            </a:r>
-          </a:p>
-          <a:p>
-            <a:pPr algn="ctr"/>
-            <a:r>
-              <a:rPr lang="en-US" sz="2800" dirty="0">
-                <a:latin typeface="Helvetica Light" panose="020B0403020202020204" pitchFamily="34" charset="0"/>
-              </a:rPr>
-              <a:t>controlling format of scalars in print statements </a:t>
-            </a:r>
-          </a:p>
-        </p:txBody>
-      </p:sp>
-      <p:sp>
-        <p:nvSpPr>
-          <p:cNvPr id="4" name="Rectangle 3">
-            <a:extLst>
-              <a:ext uri="{FF2B5EF4-FFF2-40B4-BE49-F238E27FC236}">
-                <a16:creationId xmlns:a16="http://schemas.microsoft.com/office/drawing/2014/main" id="{049F0A66-6705-AA49-B188-62B08748F2C7}"/>
-              </a:ext>
-            </a:extLst>
-          </p:cNvPr>
-          <p:cNvSpPr/>
-          <p:nvPr/>
-        </p:nvSpPr>
-        <p:spPr>
-          <a:xfrm>
-            <a:off x="1085020" y="2925497"/>
-            <a:ext cx="9604513" cy="886397"/>
-          </a:xfrm>
-          <a:prstGeom prst="rect">
-            <a:avLst/>
-          </a:prstGeom>
-        </p:spPr>
-        <p:txBody>
-          <a:bodyPr wrap="square">
-            <a:spAutoFit/>
-          </a:bodyPr>
-          <a:lstStyle/>
-          <a:p>
-            <a:pPr>
-              <a:lnSpc>
-                <a:spcPct val="115000"/>
-              </a:lnSpc>
-            </a:pPr>
-            <a:r>
-              <a:rPr lang="en-US" sz="2400" dirty="0">
-                <a:solidFill>
-                  <a:srgbClr val="000000"/>
-                </a:solidFill>
-                <a:latin typeface="Courier New" panose="02070309020205020404" pitchFamily="49" charset="0"/>
-                <a:ea typeface="Courier New" panose="02070309020205020404" pitchFamily="49" charset="0"/>
-              </a:rPr>
-              <a:t>Prod = 2/3</a:t>
-            </a:r>
-          </a:p>
-          <a:p>
-            <a:r>
-              <a:rPr lang="en-US" sz="2400" dirty="0">
-                <a:latin typeface="Courier New" panose="02070309020205020404" pitchFamily="49" charset="0"/>
-                <a:cs typeface="Courier New" panose="02070309020205020404" pitchFamily="49" charset="0"/>
-              </a:rPr>
-              <a:t>print ("2/3 should equal roughly %.3f" % (Prod))</a:t>
-            </a:r>
-          </a:p>
-        </p:txBody>
-      </p:sp>
-      <p:sp>
-        <p:nvSpPr>
-          <p:cNvPr id="5" name="Rectangle 4">
-            <a:extLst>
-              <a:ext uri="{FF2B5EF4-FFF2-40B4-BE49-F238E27FC236}">
-                <a16:creationId xmlns:a16="http://schemas.microsoft.com/office/drawing/2014/main" id="{5DB98B2A-C8E4-5E49-8404-193C135195AE}"/>
-              </a:ext>
-            </a:extLst>
-          </p:cNvPr>
-          <p:cNvSpPr/>
-          <p:nvPr/>
-        </p:nvSpPr>
-        <p:spPr>
-          <a:xfrm>
-            <a:off x="1085020" y="2294809"/>
-            <a:ext cx="5259773" cy="446276"/>
-          </a:xfrm>
-          <a:prstGeom prst="rect">
-            <a:avLst/>
-          </a:prstGeom>
-        </p:spPr>
-        <p:txBody>
-          <a:bodyPr wrap="none">
-            <a:spAutoFit/>
-          </a:bodyPr>
-          <a:lstStyle/>
-          <a:p>
-            <a:r>
-              <a:rPr lang="en-US" sz="2300" dirty="0">
-                <a:latin typeface="Courier New" panose="02070309020205020404" pitchFamily="49" charset="0"/>
-                <a:ea typeface="Courier New" panose="02070309020205020404" pitchFamily="49" charset="0"/>
-                <a:cs typeface="Courier New" panose="02070309020205020404" pitchFamily="49" charset="0"/>
-              </a:rPr>
-              <a:t>%f </a:t>
-            </a:r>
-            <a:r>
-              <a:rPr lang="en-US" sz="2300" dirty="0">
-                <a:latin typeface="Helvetica Light" panose="020B0403020202020204" pitchFamily="34" charset="0"/>
-                <a:ea typeface="Courier New" panose="02070309020205020404" pitchFamily="49" charset="0"/>
-                <a:cs typeface="Courier New" panose="02070309020205020404" pitchFamily="49" charset="0"/>
-              </a:rPr>
-              <a:t>controls precision of floats printed.</a:t>
-            </a:r>
-            <a:endParaRPr lang="en-US" sz="2300" dirty="0">
-              <a:latin typeface="+mj-lt"/>
-            </a:endParaRPr>
-          </a:p>
-        </p:txBody>
-      </p:sp>
-      <p:sp>
-        <p:nvSpPr>
-          <p:cNvPr id="6" name="Rectangle 5">
-            <a:extLst>
-              <a:ext uri="{FF2B5EF4-FFF2-40B4-BE49-F238E27FC236}">
-                <a16:creationId xmlns:a16="http://schemas.microsoft.com/office/drawing/2014/main" id="{E454B938-9C88-534D-9C2B-8106A6BC71DA}"/>
-              </a:ext>
-            </a:extLst>
-          </p:cNvPr>
-          <p:cNvSpPr/>
-          <p:nvPr/>
-        </p:nvSpPr>
-        <p:spPr>
-          <a:xfrm>
-            <a:off x="1085020" y="4347051"/>
-            <a:ext cx="9604513" cy="2202141"/>
-          </a:xfrm>
-          <a:prstGeom prst="rect">
-            <a:avLst/>
-          </a:prstGeom>
-        </p:spPr>
-        <p:txBody>
-          <a:bodyPr wrap="square">
-            <a:spAutoFit/>
-          </a:bodyPr>
-          <a:lstStyle/>
-          <a:p>
-            <a:pPr>
-              <a:lnSpc>
-                <a:spcPct val="115000"/>
-              </a:lnSpc>
-            </a:pPr>
-            <a:r>
-              <a:rPr lang="en-US" sz="2400" dirty="0">
-                <a:solidFill>
-                  <a:srgbClr val="000000"/>
-                </a:solidFill>
-                <a:latin typeface="Courier New" panose="02070309020205020404" pitchFamily="49" charset="0"/>
-                <a:ea typeface="Courier New" panose="02070309020205020404" pitchFamily="49" charset="0"/>
-              </a:rPr>
-              <a:t>Temp = 72.3</a:t>
-            </a:r>
-          </a:p>
-          <a:p>
-            <a:pPr>
-              <a:lnSpc>
-                <a:spcPct val="115000"/>
-              </a:lnSpc>
-            </a:pPr>
-            <a:r>
-              <a:rPr lang="en-US" sz="2400" dirty="0">
-                <a:solidFill>
-                  <a:srgbClr val="000000"/>
-                </a:solidFill>
-                <a:latin typeface="Courier New" panose="02070309020205020404" pitchFamily="49" charset="0"/>
-                <a:ea typeface="Courier New" panose="02070309020205020404" pitchFamily="49" charset="0"/>
-              </a:rPr>
-              <a:t>Seq = </a:t>
-            </a:r>
-            <a:r>
-              <a:rPr lang="en-US" sz="2400" dirty="0">
-                <a:latin typeface="Courier New" panose="02070309020205020404" pitchFamily="49" charset="0"/>
-                <a:cs typeface="Courier New" panose="02070309020205020404" pitchFamily="49" charset="0"/>
-              </a:rPr>
-              <a:t>"</a:t>
-            </a:r>
-            <a:r>
-              <a:rPr lang="en-US" sz="2400" dirty="0">
-                <a:solidFill>
-                  <a:srgbClr val="000000"/>
-                </a:solidFill>
-                <a:latin typeface="Courier New" panose="02070309020205020404" pitchFamily="49" charset="0"/>
-                <a:ea typeface="Courier New" panose="02070309020205020404" pitchFamily="49" charset="0"/>
-              </a:rPr>
-              <a:t>ATCCC</a:t>
-            </a:r>
-            <a:r>
-              <a:rPr lang="en-US" sz="2400" dirty="0">
-                <a:latin typeface="Courier New" panose="02070309020205020404" pitchFamily="49" charset="0"/>
-                <a:cs typeface="Courier New" panose="02070309020205020404" pitchFamily="49" charset="0"/>
-              </a:rPr>
-              <a:t>" </a:t>
-            </a:r>
-          </a:p>
-          <a:p>
-            <a:pPr>
-              <a:lnSpc>
-                <a:spcPct val="115000"/>
-              </a:lnSpc>
-            </a:pPr>
-            <a:r>
-              <a:rPr lang="en-US" sz="2400" dirty="0">
-                <a:solidFill>
-                  <a:srgbClr val="000000"/>
-                </a:solidFill>
-                <a:latin typeface="Courier New" panose="02070309020205020404" pitchFamily="49" charset="0"/>
-                <a:ea typeface="Courier New" panose="02070309020205020404" pitchFamily="49" charset="0"/>
-                <a:cs typeface="Courier New" panose="02070309020205020404" pitchFamily="49" charset="0"/>
-              </a:rPr>
-              <a:t>Num = 23</a:t>
-            </a:r>
-            <a:endParaRPr lang="en-US" sz="2400" dirty="0">
-              <a:solidFill>
-                <a:srgbClr val="000000"/>
-              </a:solidFill>
-              <a:latin typeface="Courier New" panose="02070309020205020404" pitchFamily="49" charset="0"/>
-              <a:ea typeface="Courier New" panose="02070309020205020404" pitchFamily="49" charset="0"/>
-            </a:endParaRPr>
-          </a:p>
-          <a:p>
-            <a:pPr>
-              <a:lnSpc>
-                <a:spcPct val="115000"/>
-              </a:lnSpc>
-            </a:pPr>
-            <a:r>
-              <a:rPr lang="en-US" sz="2400" dirty="0">
-                <a:latin typeface="Courier New" panose="02070309020205020404" pitchFamily="49" charset="0"/>
-                <a:cs typeface="Courier New" panose="02070309020205020404" pitchFamily="49" charset="0"/>
-              </a:rPr>
-              <a:t>print("Primer %d, bases %s, melting point %f" % (Num, Seq, Temp))</a:t>
-            </a:r>
-          </a:p>
-        </p:txBody>
-      </p:sp>
-    </p:spTree>
-    <p:extLst>
-      <p:ext uri="{BB962C8B-B14F-4D97-AF65-F5344CB8AC3E}">
-        <p14:creationId xmlns:p14="http://schemas.microsoft.com/office/powerpoint/2010/main" val="1979023920"/>
-      </p:ext>
-    </p:extLst>
-  </p:cSld>
-  <p:clrMapOvr>
-    <a:masterClrMapping/>
-  </p:clrMapOvr>
 </p:sld>
 </file>
 

--- a/week6_pythonI/week6_python.pptx
+++ b/week6_pythonI/week6_python.pptx
@@ -4989,7 +4989,7 @@
         </p:blipFill>
         <p:spPr>
           <a:xfrm>
-            <a:off x="7867406" y="4237783"/>
+            <a:off x="7867406" y="4249506"/>
             <a:ext cx="4066030" cy="1406351"/>
           </a:xfrm>
           <a:prstGeom prst="rect">
@@ -6086,13 +6086,7 @@
               <a:rPr lang="en-US" dirty="0">
                 <a:latin typeface="Helvetica Light" panose="020B0403020202020204" pitchFamily="34" charset="0"/>
               </a:rPr>
-              <a:t>As part of this exercise, you will need to control the precision of the floats printed (e.g., </a:t>
-            </a:r>
-            <a:r>
-              <a:rPr lang="en-US">
-                <a:latin typeface="Helvetica Light" panose="020B0403020202020204" pitchFamily="34" charset="0"/>
-              </a:rPr>
-              <a:t>using f-string)</a:t>
+              <a:t>As part of this exercise, you will need to control the precision of the floats printed (e.g., using f-string)</a:t>
             </a:r>
             <a:endParaRPr lang="en-US" b="1" dirty="0">
               <a:latin typeface="Helvetica Light" panose="020B0403020202020204" pitchFamily="34" charset="0"/>
